--- a/2 Topic Library/Component 1 - Computer Systems/1.5 Legal, Moral, Cultural and Ethical Issues/Year 13 - 1.5.2 Moral and Ethical Issues/1 Lesson.pptx
+++ b/2 Topic Library/Component 1 - Computer Systems/1.5 Legal, Moral, Cultural and Ethical Issues/Year 13 - 1.5.2 Moral and Ethical Issues/1 Lesson.pptx
@@ -3182,7 +3182,7 @@
                 </a:solidFill>
                 <a:latin typeface="Calibri"/>
               </a:rPr>
-              <a:t>Lesson deck — editable skeleton: adapt freely.</a:t>
+              <a:t>Editable lesson deck — adapt freely.</a:t>
             </a:r>
           </a:p>
         </p:txBody>
@@ -3283,7 +3283,7 @@
           <a:p>
             <a:pPr lvl="1"/>
             <a:r>
-              <a:rPr sz="2000" b="0">
+              <a:rPr sz="1900" b="0">
                 <a:solidFill>
                   <a:srgbClr val="222222"/>
                 </a:solidFill>
@@ -3295,7 +3295,7 @@
           <a:p>
             <a:pPr lvl="1"/>
             <a:r>
-              <a:rPr sz="2000" b="0">
+              <a:rPr sz="1900" b="0">
                 <a:solidFill>
                   <a:srgbClr val="222222"/>
                 </a:solidFill>
@@ -3307,7 +3307,7 @@
           <a:p>
             <a:pPr lvl="1"/>
             <a:r>
-              <a:rPr sz="2000" b="0">
+              <a:rPr sz="1900" b="0">
                 <a:solidFill>
                   <a:srgbClr val="222222"/>
                 </a:solidFill>
@@ -3319,7 +3319,7 @@
           <a:p>
             <a:pPr lvl="1"/>
             <a:r>
-              <a:rPr sz="2000" b="0">
+              <a:rPr sz="1900" b="0">
                 <a:solidFill>
                   <a:srgbClr val="222222"/>
                 </a:solidFill>
@@ -3331,7 +3331,7 @@
           <a:p>
             <a:pPr lvl="1"/>
             <a:r>
-              <a:rPr sz="2000" b="0">
+              <a:rPr sz="1900" b="0">
                 <a:solidFill>
                   <a:srgbClr val="222222"/>
                 </a:solidFill>
@@ -3343,7 +3343,7 @@
           <a:p>
             <a:pPr lvl="1"/>
             <a:r>
-              <a:rPr sz="2000" b="0">
+              <a:rPr sz="1900" b="0">
                 <a:solidFill>
                   <a:srgbClr val="222222"/>
                 </a:solidFill>
@@ -3355,7 +3355,7 @@
           <a:p>
             <a:pPr lvl="1"/>
             <a:r>
-              <a:rPr sz="2000" b="0">
+              <a:rPr sz="1900" b="0">
                 <a:solidFill>
                   <a:srgbClr val="222222"/>
                 </a:solidFill>
@@ -4559,7 +4559,7 @@
           <a:p>
             <a:pPr/>
             <a:r>
-              <a:rPr sz="2200" b="0">
+              <a:rPr sz="2000" b="0">
                 <a:solidFill>
                   <a:srgbClr val="222222"/>
                 </a:solidFill>
@@ -4571,7 +4571,7 @@
           <a:p>
             <a:pPr/>
             <a:r>
-              <a:rPr sz="2200" b="0">
+              <a:rPr sz="2000" b="0">
                 <a:solidFill>
                   <a:srgbClr val="222222"/>
                 </a:solidFill>
@@ -4583,7 +4583,7 @@
           <a:p>
             <a:pPr/>
             <a:r>
-              <a:rPr sz="2200" b="0">
+              <a:rPr sz="2000" b="0">
                 <a:solidFill>
                   <a:srgbClr val="222222"/>
                 </a:solidFill>
@@ -4595,7 +4595,7 @@
           <a:p>
             <a:pPr/>
             <a:r>
-              <a:rPr sz="2200" b="0">
+              <a:rPr sz="2000" b="0">
                 <a:solidFill>
                   <a:srgbClr val="222222"/>
                 </a:solidFill>
@@ -4690,7 +4690,7 @@
           <a:p>
             <a:pPr/>
             <a:r>
-              <a:rPr sz="2200" b="0">
+              <a:rPr sz="2000" b="0">
                 <a:solidFill>
                   <a:srgbClr val="222222"/>
                 </a:solidFill>
@@ -4702,7 +4702,7 @@
           <a:p>
             <a:pPr/>
             <a:r>
-              <a:rPr sz="2200" b="0">
+              <a:rPr sz="2000" b="0">
                 <a:solidFill>
                   <a:srgbClr val="222222"/>
                 </a:solidFill>
@@ -4714,7 +4714,7 @@
           <a:p>
             <a:pPr/>
             <a:r>
-              <a:rPr sz="2200" b="0">
+              <a:rPr sz="2000" b="0">
                 <a:solidFill>
                   <a:srgbClr val="222222"/>
                 </a:solidFill>
@@ -4726,7 +4726,7 @@
           <a:p>
             <a:pPr/>
             <a:r>
-              <a:rPr sz="2200" b="0">
+              <a:rPr sz="2000" b="0">
                 <a:solidFill>
                   <a:srgbClr val="222222"/>
                 </a:solidFill>
@@ -4821,7 +4821,7 @@
           <a:p>
             <a:pPr/>
             <a:r>
-              <a:rPr sz="2200" b="0">
+              <a:rPr sz="2000" b="0">
                 <a:solidFill>
                   <a:srgbClr val="222222"/>
                 </a:solidFill>
@@ -4833,7 +4833,7 @@
           <a:p>
             <a:pPr/>
             <a:r>
-              <a:rPr sz="2200" b="0">
+              <a:rPr sz="2000" b="0">
                 <a:solidFill>
                   <a:srgbClr val="222222"/>
                 </a:solidFill>
@@ -4845,7 +4845,7 @@
           <a:p>
             <a:pPr/>
             <a:r>
-              <a:rPr sz="2200" b="0">
+              <a:rPr sz="2000" b="0">
                 <a:solidFill>
                   <a:srgbClr val="222222"/>
                 </a:solidFill>
@@ -4857,7 +4857,7 @@
           <a:p>
             <a:pPr/>
             <a:r>
-              <a:rPr sz="2200" b="0">
+              <a:rPr sz="2000" b="0">
                 <a:solidFill>
                   <a:srgbClr val="222222"/>
                 </a:solidFill>
@@ -4952,7 +4952,7 @@
           <a:p>
             <a:pPr/>
             <a:r>
-              <a:rPr sz="2200" b="0">
+              <a:rPr sz="2000" b="0">
                 <a:solidFill>
                   <a:srgbClr val="222222"/>
                 </a:solidFill>
@@ -4964,7 +4964,7 @@
           <a:p>
             <a:pPr/>
             <a:r>
-              <a:rPr sz="2200" b="0">
+              <a:rPr sz="2000" b="0">
                 <a:solidFill>
                   <a:srgbClr val="222222"/>
                 </a:solidFill>
@@ -4976,7 +4976,7 @@
           <a:p>
             <a:pPr/>
             <a:r>
-              <a:rPr sz="2200" b="0">
+              <a:rPr sz="2000" b="0">
                 <a:solidFill>
                   <a:srgbClr val="222222"/>
                 </a:solidFill>
@@ -4988,7 +4988,7 @@
           <a:p>
             <a:pPr/>
             <a:r>
-              <a:rPr sz="2200" b="0">
+              <a:rPr sz="2000" b="0">
                 <a:solidFill>
                   <a:srgbClr val="222222"/>
                 </a:solidFill>

--- a/2 Topic Library/Component 1 - Computer Systems/1.5 Legal, Moral, Cultural and Ethical Issues/Year 13 - 1.5.2 Moral and Ethical Issues/1 Lesson.pptx
+++ b/2 Topic Library/Component 1 - Computer Systems/1.5 Legal, Moral, Cultural and Ethical Issues/Year 13 - 1.5.2 Moral and Ethical Issues/1 Lesson.pptx
@@ -18,6 +18,22 @@
     <p:sldId id="266" r:id="rId17"/>
     <p:sldId id="267" r:id="rId18"/>
     <p:sldId id="268" r:id="rId19"/>
+    <p:sldId id="269" r:id="rId20"/>
+    <p:sldId id="270" r:id="rId21"/>
+    <p:sldId id="271" r:id="rId22"/>
+    <p:sldId id="272" r:id="rId23"/>
+    <p:sldId id="273" r:id="rId24"/>
+    <p:sldId id="274" r:id="rId25"/>
+    <p:sldId id="275" r:id="rId26"/>
+    <p:sldId id="276" r:id="rId27"/>
+    <p:sldId id="277" r:id="rId28"/>
+    <p:sldId id="278" r:id="rId29"/>
+    <p:sldId id="279" r:id="rId30"/>
+    <p:sldId id="280" r:id="rId31"/>
+    <p:sldId id="281" r:id="rId32"/>
+    <p:sldId id="282" r:id="rId33"/>
+    <p:sldId id="283" r:id="rId34"/>
+    <p:sldId id="284" r:id="rId35"/>
   </p:sldIdLst>
   <p:sldSz cx="12191695" cy="6858000" type="screen4x3"/>
   <p:notesSz cx="6858000" cy="9144000"/>
@@ -3182,7 +3198,7 @@
                 </a:solidFill>
                 <a:latin typeface="Calibri"/>
               </a:rPr>
-              <a:t>Editable lesson deck — adapt freely.</a:t>
+              <a:t>Year 13</a:t>
             </a:r>
           </a:p>
         </p:txBody>
@@ -3242,7 +3258,7 @@
                 </a:solidFill>
                 <a:latin typeface="Calibri"/>
               </a:rPr>
-              <a:t>Worked example</a:t>
+              <a:t>Environmental effects</a:t>
             </a:r>
           </a:p>
         </p:txBody>
@@ -3271,97 +3287,61 @@
           <a:p>
             <a:pPr/>
             <a:r>
-              <a:rPr sz="2200" b="1">
-                <a:solidFill>
-                  <a:srgbClr val="2B6CB0"/>
-                </a:solidFill>
-                <a:latin typeface="Calibri"/>
-              </a:rPr>
-              <a:t>Model approach to a 12-mark levels-of-response 'discuss' question</a:t>
-            </a:r>
-          </a:p>
-          <a:p>
-            <a:pPr lvl="1"/>
-            <a:r>
-              <a:rPr sz="1900" b="0">
-                <a:solidFill>
-                  <a:srgbClr val="222222"/>
-                </a:solidFill>
-                <a:latin typeface="Calibri"/>
-              </a:rPr>
-              <a:t>1. Plan: identify the issue and list 3-4+ stakeholders (e.g. business/shareholders, employees, customers including the elderly/vulnerable, wider society) before writing.</a:t>
-            </a:r>
-          </a:p>
-          <a:p>
-            <a:pPr lvl="1"/>
-            <a:r>
-              <a:rPr sz="1900" b="0">
-                <a:solidFill>
-                  <a:srgbClr val="222222"/>
-                </a:solidFill>
-                <a:latin typeface="Calibri"/>
-              </a:rPr>
-              <a:t>2. FOR: make a benefit point, develop it (point -&gt; consequence -&gt; stakeholder), e.g. automation lowers wage costs and speeds throughput, benefiting the business and giving customers cheaper, faster service.</a:t>
-            </a:r>
-          </a:p>
-          <a:p>
-            <a:pPr lvl="1"/>
-            <a:r>
-              <a:rPr sz="1900" b="0">
-                <a:solidFill>
-                  <a:srgbClr val="222222"/>
-                </a:solidFill>
-                <a:latin typeface="Calibri"/>
-              </a:rPr>
-              <a:t>3. AGAINST: give the counter-point and develop it, e.g. checkout staff face job losses and deskilling, causing regional unemployment and harming employees and the local community.</a:t>
-            </a:r>
-          </a:p>
-          <a:p>
-            <a:pPr lvl="1"/>
-            <a:r>
-              <a:rPr sz="1900" b="0">
-                <a:solidFill>
-                  <a:srgbClr val="222222"/>
-                </a:solidFill>
-                <a:latin typeface="Calibri"/>
-              </a:rPr>
-              <a:t>4. FOR again: add a second benefit with a new stakeholder, e.g. some new technician roles are created and 24/7 service helps time-poor shoppers.</a:t>
-            </a:r>
-          </a:p>
-          <a:p>
-            <a:pPr lvl="1"/>
-            <a:r>
-              <a:rPr sz="1900" b="0">
-                <a:solidFill>
-                  <a:srgbClr val="222222"/>
-                </a:solidFill>
-                <a:latin typeface="Calibri"/>
-              </a:rPr>
-              <a:t>5. AGAINST again: add a second drawback, e.g. loss of human contact disadvantages elderly/vulnerable shoppers, and 'just walk out' tracking raises privacy and surveillance concerns.</a:t>
-            </a:r>
-          </a:p>
-          <a:p>
-            <a:pPr lvl="1"/>
-            <a:r>
-              <a:rPr sz="1900" b="0">
-                <a:solidFill>
-                  <a:srgbClr val="222222"/>
-                </a:solidFill>
-                <a:latin typeface="Calibri"/>
-              </a:rPr>
-              <a:t>6. Use accurate terminology throughout (digital divide, surveillance, deskilling) and keep the reasoning balanced and sustained to reach Level 3.</a:t>
-            </a:r>
-          </a:p>
-          <a:p>
-            <a:pPr lvl="1"/>
-            <a:r>
-              <a:rPr sz="1900" b="0">
-                <a:solidFill>
-                  <a:srgbClr val="222222"/>
-                </a:solidFill>
-                <a:latin typeface="Calibri"/>
-              </a:rPr>
-              <a:t>7. Conclusion: take a clear, justified position, ideally conditional — e.g. 'automation is justified provided staff are retrained or redeployed and some staffed tills remain for those who need assistance.'</a:t>
+              <a:rPr sz="2000" b="0">
+                <a:solidFill>
+                  <a:srgbClr val="222222"/>
+                </a:solidFill>
+                <a:latin typeface="Calibri"/>
+              </a:rPr>
+              <a:t>Harms: e-waste from short device lifespans, data centre energy and water use, rare-earth mining damage.</a:t>
+            </a:r>
+          </a:p>
+          <a:p>
+            <a:pPr/>
+            <a:r>
+              <a:rPr sz="2000" b="0">
+                <a:solidFill>
+                  <a:srgbClr val="222222"/>
+                </a:solidFill>
+                <a:latin typeface="Calibri"/>
+              </a:rPr>
+              <a:t>Planned obsolescence and non-repairable designs shorten replacement cycles.</a:t>
+            </a:r>
+          </a:p>
+          <a:p>
+            <a:pPr/>
+            <a:r>
+              <a:rPr sz="2000" b="0">
+                <a:solidFill>
+                  <a:srgbClr val="222222"/>
+                </a:solidFill>
+                <a:latin typeface="Calibri"/>
+              </a:rPr>
+              <a:t>Benefits: video calls replace travel, smart grids and heating cut energy, paperless working saves resources.</a:t>
+            </a:r>
+          </a:p>
+          <a:p>
+            <a:pPr/>
+            <a:r>
+              <a:rPr sz="2000" b="0">
+                <a:solidFill>
+                  <a:srgbClr val="222222"/>
+                </a:solidFill>
+                <a:latin typeface="Calibri"/>
+              </a:rPr>
+              <a:t>Stakeholders differ sharply: consumers enjoy cheap upgrades; mining regions and future generations carry costs.</a:t>
+            </a:r>
+          </a:p>
+          <a:p>
+            <a:pPr/>
+            <a:r>
+              <a:rPr sz="2000" b="0">
+                <a:solidFill>
+                  <a:srgbClr val="222222"/>
+                </a:solidFill>
+                <a:latin typeface="Calibri"/>
+              </a:rPr>
+              <a:t>Balanced view: computing both causes emissions and is a key tool for reducing them.</a:t>
             </a:r>
           </a:p>
         </p:txBody>
@@ -3421,7 +3401,7 @@
                 </a:solidFill>
                 <a:latin typeface="Calibri"/>
               </a:rPr>
-              <a:t>Your turn</a:t>
+              <a:t>Censorship and the internet</a:t>
             </a:r>
           </a:p>
         </p:txBody>
@@ -3450,48 +3430,61 @@
           <a:p>
             <a:pPr/>
             <a:r>
-              <a:rPr sz="2400" b="1">
-                <a:solidFill>
-                  <a:srgbClr val="2B6CB0"/>
-                </a:solidFill>
-                <a:latin typeface="Calibri"/>
-              </a:rPr>
-              <a:t>Task</a:t>
-            </a:r>
-          </a:p>
-          <a:p>
-            <a:pPr lvl="1"/>
-            <a:r>
-              <a:rPr sz="2200" b="0">
-                <a:solidFill>
-                  <a:srgbClr val="222222"/>
-                </a:solidFill>
-                <a:latin typeface="Calibri"/>
-              </a:rPr>
-              <a:t>Pick one issue (automation, AI bias, environmental impact, censorship or surveillance) and build a two-column FOR/AGAINST table with at least three developed points per side, naming the stakeholder affected by each point.</a:t>
-            </a:r>
-          </a:p>
-          <a:p>
-            <a:r>
-              <a:rPr sz="2400" b="1">
-                <a:solidFill>
-                  <a:srgbClr val="B76E00"/>
-                </a:solidFill>
-                <a:latin typeface="Calibri"/>
-              </a:rPr>
-              <a:t>Challenge / stretch</a:t>
-            </a:r>
-          </a:p>
-          <a:p>
-            <a:pPr lvl="1"/>
-            <a:r>
-              <a:rPr sz="2200" b="0">
-                <a:solidFill>
-                  <a:srgbClr val="222222"/>
-                </a:solidFill>
-                <a:latin typeface="Calibri"/>
-              </a:rPr>
-              <a:t>Write a full justified conclusion (4-5 sentences) for the supermarket self-checkout 'discuss' question that takes a clear, conditional position and explicitly weighs the interests of at least three named stakeholders against one another.</a:t>
+              <a:rPr sz="2000" b="0">
+                <a:solidFill>
+                  <a:srgbClr val="222222"/>
+                </a:solidFill>
+                <a:latin typeface="Calibri"/>
+              </a:rPr>
+              <a:t>For: protects children, removes illegal material, limits extremist and harmful content.</a:t>
+            </a:r>
+          </a:p>
+          <a:p>
+            <a:pPr/>
+            <a:r>
+              <a:rPr sz="2000" b="0">
+                <a:solidFill>
+                  <a:srgbClr val="222222"/>
+                </a:solidFill>
+                <a:latin typeface="Calibri"/>
+              </a:rPr>
+              <a:t>Against: restricts free speech, and filters overblock legitimate content such as health advice.</a:t>
+            </a:r>
+          </a:p>
+          <a:p>
+            <a:pPr/>
+            <a:r>
+              <a:rPr sz="2000" b="0">
+                <a:solidFill>
+                  <a:srgbClr val="222222"/>
+                </a:solidFill>
+                <a:latin typeface="Calibri"/>
+              </a:rPr>
+              <a:t>States can abuse censorship to silence dissent and control the news their citizens see.</a:t>
+            </a:r>
+          </a:p>
+          <a:p>
+            <a:pPr/>
+            <a:r>
+              <a:rPr sz="2000" b="0">
+                <a:solidFill>
+                  <a:srgbClr val="222222"/>
+                </a:solidFill>
+                <a:latin typeface="Calibri"/>
+              </a:rPr>
+              <a:t>Platforms moderating content are private companies making public-speech decisions with little accountability.</a:t>
+            </a:r>
+          </a:p>
+          <a:p>
+            <a:pPr/>
+            <a:r>
+              <a:rPr sz="2000" b="0">
+                <a:solidFill>
+                  <a:srgbClr val="222222"/>
+                </a:solidFill>
+                <a:latin typeface="Calibri"/>
+              </a:rPr>
+              <a:t>Key question for essays: who decides what is harmful, and who watches them?</a:t>
             </a:r>
           </a:p>
         </p:txBody>
@@ -3551,7 +3544,7 @@
                 </a:solidFill>
                 <a:latin typeface="Calibri"/>
               </a:rPr>
-              <a:t>Exit ticket</a:t>
+              <a:t>Monitoring behaviour</a:t>
             </a:r>
           </a:p>
         </p:txBody>
@@ -3578,36 +3571,63 @@
           </a:bodyPr>
           <a:lstStyle/>
           <a:p>
-            <a:r>
-              <a:rPr sz="2200" b="1">
-                <a:solidFill>
-                  <a:srgbClr val="222222"/>
-                </a:solidFill>
-                <a:latin typeface="Calibri"/>
-              </a:rPr>
-              <a:t>1. Give one benefit and one drawback of automated decision making.</a:t>
-            </a:r>
-          </a:p>
-          <a:p>
-            <a:r>
-              <a:rPr sz="2200" b="1">
-                <a:solidFill>
-                  <a:srgbClr val="222222"/>
-                </a:solidFill>
-                <a:latin typeface="Calibri"/>
-              </a:rPr>
-              <a:t>2. What three things must a Level 3 'discuss' answer contain?</a:t>
-            </a:r>
-          </a:p>
-          <a:p>
-            <a:r>
-              <a:rPr sz="2200" b="1">
-                <a:solidFill>
-                  <a:srgbClr val="222222"/>
-                </a:solidFill>
-                <a:latin typeface="Calibri"/>
-              </a:rPr>
-              <a:t>3. State one benefit and one drawback of mass surveillance.</a:t>
+            <a:pPr/>
+            <a:r>
+              <a:rPr sz="2000" b="0">
+                <a:solidFill>
+                  <a:srgbClr val="222222"/>
+                </a:solidFill>
+                <a:latin typeface="Calibri"/>
+              </a:rPr>
+              <a:t>Employers monitor email and keystrokes; cities use CCTV and facial recognition; states intercept communications.</a:t>
+            </a:r>
+          </a:p>
+          <a:p>
+            <a:pPr/>
+            <a:r>
+              <a:rPr sz="2000" b="0">
+                <a:solidFill>
+                  <a:srgbClr val="222222"/>
+                </a:solidFill>
+                <a:latin typeface="Calibri"/>
+              </a:rPr>
+              <a:t>For: deters crime, protects staff and customers, catches misconduct, measures productivity fairly.</a:t>
+            </a:r>
+          </a:p>
+          <a:p>
+            <a:pPr/>
+            <a:r>
+              <a:rPr sz="2000" b="0">
+                <a:solidFill>
+                  <a:srgbClr val="222222"/>
+                </a:solidFill>
+                <a:latin typeface="Calibri"/>
+              </a:rPr>
+              <a:t>Against: erodes privacy, chills lawful behaviour, and facial recognition misidentifies some groups more often.</a:t>
+            </a:r>
+          </a:p>
+          <a:p>
+            <a:pPr/>
+            <a:r>
+              <a:rPr sz="2000" b="0">
+                <a:solidFill>
+                  <a:srgbClr val="222222"/>
+                </a:solidFill>
+                <a:latin typeface="Calibri"/>
+              </a:rPr>
+              <a:t>Workplace monitoring must be proportionate and declared (DPA); state interception needs RIPA authorisation.</a:t>
+            </a:r>
+          </a:p>
+          <a:p>
+            <a:pPr/>
+            <a:r>
+              <a:rPr sz="2000" b="0">
+                <a:solidFill>
+                  <a:srgbClr val="222222"/>
+                </a:solidFill>
+                <a:latin typeface="Calibri"/>
+              </a:rPr>
+              <a:t>Strong essays weigh security gains against privacy loss for named groups.</a:t>
             </a:r>
           </a:p>
         </p:txBody>
@@ -3667,7 +3687,7 @@
                 </a:solidFill>
                 <a:latin typeface="Calibri"/>
               </a:rPr>
-              <a:t>Exit ticket — answers</a:t>
+              <a:t>Analysing personal information</a:t>
             </a:r>
           </a:p>
         </p:txBody>
@@ -3694,72 +3714,1077 @@
           </a:bodyPr>
           <a:lstStyle/>
           <a:p>
+            <a:pPr/>
+            <a:r>
+              <a:rPr sz="2000" b="0">
+                <a:solidFill>
+                  <a:srgbClr val="222222"/>
+                </a:solidFill>
+                <a:latin typeface="Calibri"/>
+              </a:rPr>
+              <a:t>Companies mine purchase, browsing and location data to profile individuals.</a:t>
+            </a:r>
+          </a:p>
+          <a:p>
+            <a:pPr/>
+            <a:r>
+              <a:rPr sz="2000" b="0">
+                <a:solidFill>
+                  <a:srgbClr val="222222"/>
+                </a:solidFill>
+                <a:latin typeface="Calibri"/>
+              </a:rPr>
+              <a:t>Benefits: personalised services and recommendations, fraud detection, medical research from population data.</a:t>
+            </a:r>
+          </a:p>
+          <a:p>
+            <a:pPr/>
+            <a:r>
+              <a:rPr sz="2000" b="0">
+                <a:solidFill>
+                  <a:srgbClr val="222222"/>
+                </a:solidFill>
+                <a:latin typeface="Calibri"/>
+              </a:rPr>
+              <a:t>Harms: profiling enables manipulation and price discrimination; data is sold onward; anonymised data can be re-identified.</a:t>
+            </a:r>
+          </a:p>
+          <a:p>
+            <a:pPr/>
+            <a:r>
+              <a:rPr sz="2000" b="0">
+                <a:solidFill>
+                  <a:srgbClr val="222222"/>
+                </a:solidFill>
+                <a:latin typeface="Calibri"/>
+              </a:rPr>
+              <a:t>People rarely understand what they consented to; the DPA demands transparency and purpose limitation.</a:t>
+            </a:r>
+          </a:p>
+          <a:p>
+            <a:pPr/>
+            <a:r>
+              <a:rPr sz="2000" b="0">
+                <a:solidFill>
+                  <a:srgbClr val="222222"/>
+                </a:solidFill>
+                <a:latin typeface="Calibri"/>
+              </a:rPr>
+              <a:t>Stakeholder split: convenience for consumers, revenue for firms, lost control for data subjects.</a:t>
+            </a:r>
+          </a:p>
+        </p:txBody>
+      </p:sp>
+    </p:spTree>
+  </p:cSld>
+  <p:clrMapOvr>
+    <a:masterClrMapping/>
+  </p:clrMapOvr>
+</p:sld>
+</file>
+
+<file path=ppt/slides/slide14.xml><?xml version="1.0" encoding="utf-8"?>
+<p:sld xmlns:a="http://schemas.openxmlformats.org/drawingml/2006/main" xmlns:p="http://schemas.openxmlformats.org/presentationml/2006/main" xmlns:r="http://schemas.openxmlformats.org/officeDocument/2006/relationships">
+  <p:cSld>
+    <p:bg>
+      <p:bgPr>
+        <a:solidFill>
+          <a:srgbClr val="FFFFFF"/>
+        </a:solidFill>
+        <a:effectLst/>
+      </p:bgPr>
+    </p:bg>
+    <p:spTree>
+      <p:nvGrpSpPr>
+        <p:cNvPr id="1" name=""/>
+        <p:cNvGrpSpPr/>
+        <p:nvPr/>
+      </p:nvGrpSpPr>
+      <p:grpSpPr/>
+      <p:sp>
+        <p:nvSpPr>
+          <p:cNvPr id="2" name="TextBox 1"/>
+          <p:cNvSpPr txBox="1"/>
+          <p:nvPr/>
+        </p:nvSpPr>
+        <p:spPr>
+          <a:xfrm>
+            <a:off x="548640" y="274320"/>
+            <a:ext cx="11064240" cy="822960"/>
+          </a:xfrm>
+          <a:prstGeom prst="rect">
+            <a:avLst/>
+          </a:prstGeom>
+          <a:noFill/>
+        </p:spPr>
+        <p:txBody>
+          <a:bodyPr wrap="square">
+            <a:spAutoFit/>
+          </a:bodyPr>
+          <a:lstStyle/>
+          <a:p>
+            <a:r>
+              <a:rPr sz="3000" b="1" i="0">
+                <a:solidFill>
+                  <a:srgbClr val="2B6CB0"/>
+                </a:solidFill>
+                <a:latin typeface="Calibri"/>
+              </a:rPr>
+              <a:t>Piracy and offensive communications</a:t>
+            </a:r>
+          </a:p>
+        </p:txBody>
+      </p:sp>
+      <p:sp>
+        <p:nvSpPr>
+          <p:cNvPr id="3" name="TextBox 2"/>
+          <p:cNvSpPr txBox="1"/>
+          <p:nvPr/>
+        </p:nvSpPr>
+        <p:spPr>
+          <a:xfrm>
+            <a:off x="640080" y="1280160"/>
+            <a:ext cx="10881360" cy="5120640"/>
+          </a:xfrm>
+          <a:prstGeom prst="rect">
+            <a:avLst/>
+          </a:prstGeom>
+          <a:noFill/>
+        </p:spPr>
+        <p:txBody>
+          <a:bodyPr wrap="square">
+            <a:spAutoFit/>
+          </a:bodyPr>
+          <a:lstStyle/>
+          <a:p>
+            <a:pPr/>
+            <a:r>
+              <a:rPr sz="2000" b="0">
+                <a:solidFill>
+                  <a:srgbClr val="222222"/>
+                </a:solidFill>
+                <a:latin typeface="Calibri"/>
+              </a:rPr>
+              <a:t>Digital copies are perfect and free to distribute, so piracy directly deprives creators of income (CDPA link).</a:t>
+            </a:r>
+          </a:p>
+          <a:p>
+            <a:pPr/>
+            <a:r>
+              <a:rPr sz="2000" b="0">
+                <a:solidFill>
+                  <a:srgbClr val="222222"/>
+                </a:solidFill>
+                <a:latin typeface="Calibri"/>
+              </a:rPr>
+              <a:t>Counter-pressures: high prices and regional unavailability push users to piracy; DRM also frustrates paying customers.</a:t>
+            </a:r>
+          </a:p>
+          <a:p>
+            <a:pPr/>
+            <a:r>
+              <a:rPr sz="2000" b="0">
+                <a:solidFill>
+                  <a:srgbClr val="222222"/>
+                </a:solidFill>
+                <a:latin typeface="Calibri"/>
+              </a:rPr>
+              <a:t>Offensive communications: anonymity and distance lower inhibitions, enabling trolling, abuse and harassment at scale.</a:t>
+            </a:r>
+          </a:p>
+          <a:p>
+            <a:pPr/>
+            <a:r>
+              <a:rPr sz="2000" b="0">
+                <a:solidFill>
+                  <a:srgbClr val="222222"/>
+                </a:solidFill>
+                <a:latin typeface="Calibri"/>
+              </a:rPr>
+              <a:t>Platforms must balance removing abuse against over-censoring robust debate.</a:t>
+            </a:r>
+          </a:p>
+          <a:p>
+            <a:pPr/>
+            <a:r>
+              <a:rPr sz="2000" b="0">
+                <a:solidFill>
+                  <a:srgbClr val="222222"/>
+                </a:solidFill>
+                <a:latin typeface="Calibri"/>
+              </a:rPr>
+              <a:t>Both areas show law lagging behaviour: enforcement across borders is genuinely hard.</a:t>
+            </a:r>
+          </a:p>
+        </p:txBody>
+      </p:sp>
+    </p:spTree>
+  </p:cSld>
+  <p:clrMapOvr>
+    <a:masterClrMapping/>
+  </p:clrMapOvr>
+</p:sld>
+</file>
+
+<file path=ppt/slides/slide15.xml><?xml version="1.0" encoding="utf-8"?>
+<p:sld xmlns:a="http://schemas.openxmlformats.org/drawingml/2006/main" xmlns:p="http://schemas.openxmlformats.org/presentationml/2006/main" xmlns:r="http://schemas.openxmlformats.org/officeDocument/2006/relationships">
+  <p:cSld>
+    <p:bg>
+      <p:bgPr>
+        <a:solidFill>
+          <a:srgbClr val="FFFFFF"/>
+        </a:solidFill>
+        <a:effectLst/>
+      </p:bgPr>
+    </p:bg>
+    <p:spTree>
+      <p:nvGrpSpPr>
+        <p:cNvPr id="1" name=""/>
+        <p:cNvGrpSpPr/>
+        <p:nvPr/>
+      </p:nvGrpSpPr>
+      <p:grpSpPr/>
+      <p:sp>
+        <p:nvSpPr>
+          <p:cNvPr id="2" name="TextBox 1"/>
+          <p:cNvSpPr txBox="1"/>
+          <p:nvPr/>
+        </p:nvSpPr>
+        <p:spPr>
+          <a:xfrm>
+            <a:off x="548640" y="274320"/>
+            <a:ext cx="11064240" cy="822960"/>
+          </a:xfrm>
+          <a:prstGeom prst="rect">
+            <a:avLst/>
+          </a:prstGeom>
+          <a:noFill/>
+        </p:spPr>
+        <p:txBody>
+          <a:bodyPr wrap="square">
+            <a:spAutoFit/>
+          </a:bodyPr>
+          <a:lstStyle/>
+          <a:p>
+            <a:r>
+              <a:rPr sz="3000" b="1" i="0">
+                <a:solidFill>
+                  <a:srgbClr val="2B6CB0"/>
+                </a:solidFill>
+                <a:latin typeface="Calibri"/>
+              </a:rPr>
+              <a:t>Layout, colour paradigms and character sets</a:t>
+            </a:r>
+          </a:p>
+        </p:txBody>
+      </p:sp>
+      <p:sp>
+        <p:nvSpPr>
+          <p:cNvPr id="3" name="TextBox 2"/>
+          <p:cNvSpPr txBox="1"/>
+          <p:nvPr/>
+        </p:nvSpPr>
+        <p:spPr>
+          <a:xfrm>
+            <a:off x="640080" y="1280160"/>
+            <a:ext cx="10881360" cy="5120640"/>
+          </a:xfrm>
+          <a:prstGeom prst="rect">
+            <a:avLst/>
+          </a:prstGeom>
+          <a:noFill/>
+        </p:spPr>
+        <p:txBody>
+          <a:bodyPr wrap="square">
+            <a:spAutoFit/>
+          </a:bodyPr>
+          <a:lstStyle/>
+          <a:p>
+            <a:pPr/>
+            <a:r>
+              <a:rPr sz="2000" b="0">
+                <a:solidFill>
+                  <a:srgbClr val="222222"/>
+                </a:solidFill>
+                <a:latin typeface="Calibri"/>
+              </a:rPr>
+              <a:t>Colour carries different cultural meanings: red is danger in the West, luck in China.</a:t>
+            </a:r>
+          </a:p>
+          <a:p>
+            <a:pPr/>
+            <a:r>
+              <a:rPr sz="2000" b="0">
+                <a:solidFill>
+                  <a:srgbClr val="222222"/>
+                </a:solidFill>
+                <a:latin typeface="Calibri"/>
+              </a:rPr>
+              <a:t>Accessibility: never rely on colour alone; support contrast, screen readers and colour-blind users.</a:t>
+            </a:r>
+          </a:p>
+          <a:p>
+            <a:pPr/>
+            <a:r>
+              <a:rPr sz="2000" b="0">
+                <a:solidFill>
+                  <a:srgbClr val="222222"/>
+                </a:solidFill>
+                <a:latin typeface="Calibri"/>
+              </a:rPr>
+              <a:t>Layout assumptions break across cultures: some scripts read right to left, changing whole interfaces.</a:t>
+            </a:r>
+          </a:p>
+          <a:p>
+            <a:pPr/>
+            <a:r>
+              <a:rPr sz="2000" b="0">
+                <a:solidFill>
+                  <a:srgbClr val="222222"/>
+                </a:solidFill>
+                <a:latin typeface="Calibri"/>
+              </a:rPr>
+              <a:t>ASCII encoded only Latin characters, excluding most of the world's languages from early computing.</a:t>
+            </a:r>
+          </a:p>
+          <a:p>
+            <a:pPr/>
+            <a:r>
+              <a:rPr sz="2000" b="0">
+                <a:solidFill>
+                  <a:srgbClr val="222222"/>
+                </a:solidFill>
+                <a:latin typeface="Calibri"/>
+              </a:rPr>
+              <a:t>Unicode gives every major script code points, making software genuinely international.</a:t>
+            </a:r>
+          </a:p>
+          <a:p>
+            <a:pPr/>
+            <a:r>
+              <a:rPr sz="1800" b="1">
+                <a:solidFill>
+                  <a:srgbClr val="B76E00"/>
+                </a:solidFill>
+                <a:latin typeface="Calibri"/>
+              </a:rPr>
+              <a:t>This is the cultural corner of the spec: design choices silently include or exclude whole groups.</a:t>
+            </a:r>
+          </a:p>
+        </p:txBody>
+      </p:sp>
+    </p:spTree>
+  </p:cSld>
+  <p:clrMapOvr>
+    <a:masterClrMapping/>
+  </p:clrMapOvr>
+</p:sld>
+</file>
+
+<file path=ppt/slides/slide16.xml><?xml version="1.0" encoding="utf-8"?>
+<p:sld xmlns:a="http://schemas.openxmlformats.org/drawingml/2006/main" xmlns:p="http://schemas.openxmlformats.org/presentationml/2006/main" xmlns:r="http://schemas.openxmlformats.org/officeDocument/2006/relationships">
+  <p:cSld>
+    <p:bg>
+      <p:bgPr>
+        <a:solidFill>
+          <a:srgbClr val="FFFFFF"/>
+        </a:solidFill>
+        <a:effectLst/>
+      </p:bgPr>
+    </p:bg>
+    <p:spTree>
+      <p:nvGrpSpPr>
+        <p:cNvPr id="1" name=""/>
+        <p:cNvGrpSpPr/>
+        <p:nvPr/>
+      </p:nvGrpSpPr>
+      <p:grpSpPr/>
+      <p:sp>
+        <p:nvSpPr>
+          <p:cNvPr id="2" name="TextBox 1"/>
+          <p:cNvSpPr txBox="1"/>
+          <p:nvPr/>
+        </p:nvSpPr>
+        <p:spPr>
+          <a:xfrm>
+            <a:off x="548640" y="274320"/>
+            <a:ext cx="11064240" cy="822960"/>
+          </a:xfrm>
+          <a:prstGeom prst="rect">
+            <a:avLst/>
+          </a:prstGeom>
+          <a:noFill/>
+        </p:spPr>
+        <p:txBody>
+          <a:bodyPr wrap="square">
+            <a:spAutoFit/>
+          </a:bodyPr>
+          <a:lstStyle/>
+          <a:p>
+            <a:r>
+              <a:rPr sz="3000" b="1" i="0">
+                <a:solidFill>
+                  <a:srgbClr val="2B6CB0"/>
+                </a:solidFill>
+                <a:latin typeface="Calibri"/>
+              </a:rPr>
+              <a:t>Worked example 1</a:t>
+            </a:r>
+          </a:p>
+        </p:txBody>
+      </p:sp>
+      <p:sp>
+        <p:nvSpPr>
+          <p:cNvPr id="3" name="TextBox 2"/>
+          <p:cNvSpPr txBox="1"/>
+          <p:nvPr/>
+        </p:nvSpPr>
+        <p:spPr>
+          <a:xfrm>
+            <a:off x="640080" y="1280160"/>
+            <a:ext cx="10881360" cy="5120640"/>
+          </a:xfrm>
+          <a:prstGeom prst="rect">
+            <a:avLst/>
+          </a:prstGeom>
+          <a:noFill/>
+        </p:spPr>
+        <p:txBody>
+          <a:bodyPr wrap="square">
+            <a:spAutoFit/>
+          </a:bodyPr>
+          <a:lstStyle/>
+          <a:p>
+            <a:pPr/>
             <a:r>
               <a:rPr sz="2200" b="1">
                 <a:solidFill>
-                  <a:srgbClr val="222222"/>
-                </a:solidFill>
-                <a:latin typeface="Calibri"/>
-              </a:rPr>
-              <a:t>1. Give one benefit and one drawback of automated decision making.</a:t>
+                  <a:srgbClr val="2B6CB0"/>
+                </a:solidFill>
+                <a:latin typeface="Calibri"/>
+              </a:rPr>
+              <a:t>Planning a 9-mark 'discuss' answer: a supermarket chain replaces all staffed checkouts with self-checkout</a:t>
             </a:r>
           </a:p>
           <a:p>
             <a:pPr lvl="1"/>
             <a:r>
-              <a:rPr sz="1800" i="1">
+              <a:rPr sz="1900" b="0">
+                <a:solidFill>
+                  <a:srgbClr val="222222"/>
+                </a:solidFill>
+                <a:latin typeface="Calibri"/>
+              </a:rPr>
+              <a:t>1. Read the command word: discuss requires both sides and a justified conclusion; plan for two minutes before writing.</a:t>
+            </a:r>
+          </a:p>
+          <a:p>
+            <a:pPr lvl="1"/>
+            <a:r>
+              <a:rPr sz="1900" b="0">
+                <a:solidFill>
+                  <a:srgbClr val="222222"/>
+                </a:solidFill>
+                <a:latin typeface="Calibri"/>
+              </a:rPr>
+              <a:t>2. Brainstorm stakeholders: checkout staff, the supermarket, customers (including elderly and disabled), wider society.</a:t>
+            </a:r>
+          </a:p>
+          <a:p>
+            <a:pPr lvl="1"/>
+            <a:r>
+              <a:rPr sz="1900" b="0">
+                <a:solidFill>
+                  <a:srgbClr val="222222"/>
+                </a:solidFill>
+                <a:latin typeface="Calibri"/>
+              </a:rPr>
+              <a:t>3. FOR points, each developed: lower staffing costs mean lower prices (customers gain); shorter queues at peak times; staff freed for service roles.</a:t>
+            </a:r>
+          </a:p>
+          <a:p>
+            <a:pPr lvl="1"/>
+            <a:r>
+              <a:rPr sz="1900" b="0">
+                <a:solidFill>
+                  <a:srgbClr val="222222"/>
+                </a:solidFill>
+                <a:latin typeface="Calibri"/>
+              </a:rPr>
+              <a:t>4. AGAINST points, each developed: job losses hit low-skilled workers hardest, and local unemployment costs fall on society; elderly or visually impaired customers may be excluded (digital divide); theft and machine errors shift work to customers.</a:t>
+            </a:r>
+          </a:p>
+          <a:p>
+            <a:pPr lvl="1"/>
+            <a:r>
+              <a:rPr sz="1900" b="0">
+                <a:solidFill>
+                  <a:srgbClr val="222222"/>
+                </a:solidFill>
+                <a:latin typeface="Calibri"/>
+              </a:rPr>
+              <a:t>5. Use the chain for each point: point, consequence, stakeholder, counter. Example: costs fall (point), prices drop (consequence), customers benefit (stakeholder), BUT savings may go to shareholders instead (counter).</a:t>
+            </a:r>
+          </a:p>
+          <a:p>
+            <a:pPr lvl="1"/>
+            <a:r>
+              <a:rPr sz="1900" b="0">
+                <a:solidFill>
+                  <a:srgbClr val="222222"/>
+                </a:solidFill>
+                <a:latin typeface="Calibri"/>
+              </a:rPr>
+              <a:t>6. Weigh the sides explicitly: the harm concentrates on a vulnerable few, while the benefit spreads thinly across many.</a:t>
+            </a:r>
+          </a:p>
+          <a:p>
+            <a:pPr lvl="1"/>
+            <a:r>
+              <a:rPr sz="1900" b="0">
+                <a:solidFill>
+                  <a:srgbClr val="222222"/>
+                </a:solidFill>
+                <a:latin typeface="Calibri"/>
+              </a:rPr>
+              <a:t>7. Conclude with a condition: acceptable only if staff are retrained and redeployed and some staffed tills remain for those who need them.</a:t>
+            </a:r>
+          </a:p>
+          <a:p>
+            <a:pPr lvl="1"/>
+            <a:r>
+              <a:rPr sz="1900" b="0">
+                <a:solidFill>
+                  <a:srgbClr val="222222"/>
+                </a:solidFill>
+                <a:latin typeface="Calibri"/>
+              </a:rPr>
+              <a:t>8. Check the levels: named stakeholders, both sides developed, accurate terminology and a justified conditional conclusion is Level 3; a list of unexplained points either way stalls at Level 1.</a:t>
+            </a:r>
+          </a:p>
+        </p:txBody>
+      </p:sp>
+    </p:spTree>
+  </p:cSld>
+  <p:clrMapOvr>
+    <a:masterClrMapping/>
+  </p:clrMapOvr>
+</p:sld>
+</file>
+
+<file path=ppt/slides/slide17.xml><?xml version="1.0" encoding="utf-8"?>
+<p:sld xmlns:a="http://schemas.openxmlformats.org/drawingml/2006/main" xmlns:p="http://schemas.openxmlformats.org/presentationml/2006/main" xmlns:r="http://schemas.openxmlformats.org/officeDocument/2006/relationships">
+  <p:cSld>
+    <p:bg>
+      <p:bgPr>
+        <a:solidFill>
+          <a:srgbClr val="FFFFFF"/>
+        </a:solidFill>
+        <a:effectLst/>
+      </p:bgPr>
+    </p:bg>
+    <p:spTree>
+      <p:nvGrpSpPr>
+        <p:cNvPr id="1" name=""/>
+        <p:cNvGrpSpPr/>
+        <p:nvPr/>
+      </p:nvGrpSpPr>
+      <p:grpSpPr/>
+      <p:sp>
+        <p:nvSpPr>
+          <p:cNvPr id="2" name="TextBox 1"/>
+          <p:cNvSpPr txBox="1"/>
+          <p:nvPr/>
+        </p:nvSpPr>
+        <p:spPr>
+          <a:xfrm>
+            <a:off x="548640" y="274320"/>
+            <a:ext cx="11064240" cy="822960"/>
+          </a:xfrm>
+          <a:prstGeom prst="rect">
+            <a:avLst/>
+          </a:prstGeom>
+          <a:noFill/>
+        </p:spPr>
+        <p:txBody>
+          <a:bodyPr wrap="square">
+            <a:spAutoFit/>
+          </a:bodyPr>
+          <a:lstStyle/>
+          <a:p>
+            <a:r>
+              <a:rPr sz="3000" b="1" i="0">
+                <a:solidFill>
+                  <a:srgbClr val="2B6CB0"/>
+                </a:solidFill>
+                <a:latin typeface="Calibri"/>
+              </a:rPr>
+              <a:t>Worked example 2</a:t>
+            </a:r>
+          </a:p>
+        </p:txBody>
+      </p:sp>
+      <p:sp>
+        <p:nvSpPr>
+          <p:cNvPr id="3" name="TextBox 2"/>
+          <p:cNvSpPr txBox="1"/>
+          <p:nvPr/>
+        </p:nvSpPr>
+        <p:spPr>
+          <a:xfrm>
+            <a:off x="640080" y="1280160"/>
+            <a:ext cx="10881360" cy="5120640"/>
+          </a:xfrm>
+          <a:prstGeom prst="rect">
+            <a:avLst/>
+          </a:prstGeom>
+          <a:noFill/>
+        </p:spPr>
+        <p:txBody>
+          <a:bodyPr wrap="square">
+            <a:spAutoFit/>
+          </a:bodyPr>
+          <a:lstStyle/>
+          <a:p>
+            <a:pPr/>
+            <a:r>
+              <a:rPr sz="2200" b="1">
+                <a:solidFill>
+                  <a:srgbClr val="2B6CB0"/>
+                </a:solidFill>
+                <a:latin typeface="Calibri"/>
+              </a:rPr>
+              <a:t>Applying the framing: an AI system shortlists job applications automatically</a:t>
+            </a:r>
+          </a:p>
+          <a:p>
+            <a:pPr lvl="1"/>
+            <a:r>
+              <a:rPr sz="1900" b="0">
+                <a:solidFill>
+                  <a:srgbClr val="222222"/>
+                </a:solidFill>
+                <a:latin typeface="Calibri"/>
+              </a:rPr>
+              <a:t>1. Identify the issue areas engaged: automated decision making, AI bias, and analysing personal information.</a:t>
+            </a:r>
+          </a:p>
+          <a:p>
+            <a:pPr lvl="1"/>
+            <a:r>
+              <a:rPr sz="1900" b="0">
+                <a:solidFill>
+                  <a:srgbClr val="222222"/>
+                </a:solidFill>
+                <a:latin typeface="Calibri"/>
+              </a:rPr>
+              <a:t>2. Stakeholders: applicants, the employer, existing employees, the regulator and society.</a:t>
+            </a:r>
+          </a:p>
+          <a:p>
+            <a:pPr lvl="1"/>
+            <a:r>
+              <a:rPr sz="1900" b="0">
+                <a:solidFill>
+                  <a:srgbClr val="222222"/>
+                </a:solidFill>
+                <a:latin typeface="Calibri"/>
+              </a:rPr>
+              <a:t>3. FOR chain: the AI screens thousands of CVs in minutes (point), so hiring is faster and cheaper (consequence), benefiting the employer (stakeholder), and identical rules apply to every CV, removing interviewer mood (extension).</a:t>
+            </a:r>
+          </a:p>
+          <a:p>
+            <a:pPr lvl="1"/>
+            <a:r>
+              <a:rPr sz="1900" b="0">
+                <a:solidFill>
+                  <a:srgbClr val="222222"/>
+                </a:solidFill>
+                <a:latin typeface="Calibri"/>
+              </a:rPr>
+              <a:t>4. AGAINST chain 1: the AI trained on past hires (point), so it learns historical discrimination, for example downgrading CVs resembling previously rejected groups (consequence), harming qualified applicants (stakeholder), even though no one intended bias (development).</a:t>
+            </a:r>
+          </a:p>
+          <a:p>
+            <a:pPr lvl="1"/>
+            <a:r>
+              <a:rPr sz="1900" b="0">
+                <a:solidFill>
+                  <a:srgbClr val="222222"/>
+                </a:solidFill>
+                <a:latin typeface="Calibri"/>
+              </a:rPr>
+              <a:t>5. AGAINST chain 2: rejected applicants get no explanation (point), so they cannot appeal or improve (consequence); the DPA's provisions on automated decisions and the accountability principle are engaged (law link).</a:t>
+            </a:r>
+          </a:p>
+          <a:p>
+            <a:pPr lvl="1"/>
+            <a:r>
+              <a:rPr sz="1900" b="0">
+                <a:solidFill>
+                  <a:srgbClr val="222222"/>
+                </a:solidFill>
+                <a:latin typeface="Calibri"/>
+              </a:rPr>
+              <a:t>6. Counter the counter: a human panel is also biased, but a biased algorithm applies its bias to every applicant identically and at scale.</a:t>
+            </a:r>
+          </a:p>
+          <a:p>
+            <a:pPr lvl="1"/>
+            <a:r>
+              <a:rPr sz="1900" b="0">
+                <a:solidFill>
+                  <a:srgbClr val="222222"/>
+                </a:solidFill>
+                <a:latin typeface="Calibri"/>
+              </a:rPr>
+              <a:t>7. Weighed conclusion with a condition: use the AI to rank, not reject; require human review of rejections, regular bias audits against outcomes, and an explanation route for applicants.</a:t>
+            </a:r>
+          </a:p>
+          <a:p>
+            <a:pPr lvl="1"/>
+            <a:r>
+              <a:rPr sz="1900" b="0">
+                <a:solidFill>
+                  <a:srgbClr val="222222"/>
+                </a:solidFill>
+                <a:latin typeface="Calibri"/>
+              </a:rPr>
+              <a:t>8. Note the transferable skeleton: this exact structure answers any 'Company X automates decision Y, discuss' question.</a:t>
+            </a:r>
+          </a:p>
+        </p:txBody>
+      </p:sp>
+    </p:spTree>
+  </p:cSld>
+  <p:clrMapOvr>
+    <a:masterClrMapping/>
+  </p:clrMapOvr>
+</p:sld>
+</file>
+
+<file path=ppt/slides/slide18.xml><?xml version="1.0" encoding="utf-8"?>
+<p:sld xmlns:a="http://schemas.openxmlformats.org/drawingml/2006/main" xmlns:p="http://schemas.openxmlformats.org/presentationml/2006/main" xmlns:r="http://schemas.openxmlformats.org/officeDocument/2006/relationships">
+  <p:cSld>
+    <p:bg>
+      <p:bgPr>
+        <a:solidFill>
+          <a:srgbClr val="FFFFFF"/>
+        </a:solidFill>
+        <a:effectLst/>
+      </p:bgPr>
+    </p:bg>
+    <p:spTree>
+      <p:nvGrpSpPr>
+        <p:cNvPr id="1" name=""/>
+        <p:cNvGrpSpPr/>
+        <p:nvPr/>
+      </p:nvGrpSpPr>
+      <p:grpSpPr/>
+      <p:sp>
+        <p:nvSpPr>
+          <p:cNvPr id="2" name="TextBox 1"/>
+          <p:cNvSpPr txBox="1"/>
+          <p:nvPr/>
+        </p:nvSpPr>
+        <p:spPr>
+          <a:xfrm>
+            <a:off x="548640" y="274320"/>
+            <a:ext cx="11064240" cy="822960"/>
+          </a:xfrm>
+          <a:prstGeom prst="rect">
+            <a:avLst/>
+          </a:prstGeom>
+          <a:noFill/>
+        </p:spPr>
+        <p:txBody>
+          <a:bodyPr wrap="square">
+            <a:spAutoFit/>
+          </a:bodyPr>
+          <a:lstStyle/>
+          <a:p>
+            <a:r>
+              <a:rPr sz="3000" b="1" i="0">
+                <a:solidFill>
+                  <a:srgbClr val="2B6CB0"/>
+                </a:solidFill>
+                <a:latin typeface="Calibri"/>
+              </a:rPr>
+              <a:t>Activity 1</a:t>
+            </a:r>
+          </a:p>
+        </p:txBody>
+      </p:sp>
+      <p:sp>
+        <p:nvSpPr>
+          <p:cNvPr id="3" name="TextBox 2"/>
+          <p:cNvSpPr txBox="1"/>
+          <p:nvPr/>
+        </p:nvSpPr>
+        <p:spPr>
+          <a:xfrm>
+            <a:off x="640080" y="1280160"/>
+            <a:ext cx="10881360" cy="5120640"/>
+          </a:xfrm>
+          <a:prstGeom prst="rect">
+            <a:avLst/>
+          </a:prstGeom>
+          <a:noFill/>
+        </p:spPr>
+        <p:txBody>
+          <a:bodyPr wrap="square">
+            <a:spAutoFit/>
+          </a:bodyPr>
+          <a:lstStyle/>
+          <a:p>
+            <a:pPr/>
+            <a:r>
+              <a:rPr sz="2200" b="1">
+                <a:solidFill>
+                  <a:srgbClr val="2B6CB0"/>
+                </a:solidFill>
+                <a:latin typeface="Calibri"/>
+              </a:rPr>
+              <a:t>Silent debate: should the algorithm decide?  (20 min)</a:t>
+            </a:r>
+          </a:p>
+          <a:p>
+            <a:pPr lvl="1"/>
+            <a:r>
+              <a:rPr sz="2000" b="0">
+                <a:solidFill>
+                  <a:srgbClr val="222222"/>
+                </a:solidFill>
+                <a:latin typeface="Calibri"/>
+              </a:rPr>
+              <a:t>Five A3 sheets, same prompt on each: a bank replaces human loan officers with an AI that approves or rejects mortgages. Each sheet has a different stakeholder lens: the rejected applicant, shareholders, the loan officers, a regulator, society.</a:t>
+            </a:r>
+          </a:p>
+          <a:p>
+            <a:pPr lvl="1"/>
+            <a:r>
+              <a:rPr sz="2000" b="0">
+                <a:solidFill>
+                  <a:srgbClr val="222222"/>
+                </a:solidFill>
+                <a:latin typeface="Calibri"/>
+              </a:rPr>
+              <a:t>Groups write arguments in role on their sheet, in silence; disagreement happens in ink.</a:t>
+            </a:r>
+          </a:p>
+          <a:p>
+            <a:pPr lvl="1"/>
+            <a:r>
+              <a:rPr sz="2000" b="0">
+                <a:solidFill>
+                  <a:srgbClr val="222222"/>
+                </a:solidFill>
+                <a:latin typeface="Calibri"/>
+              </a:rPr>
+              <a:t>Rotate sheets every three minutes: groups must extend, counter or connect what is already written.</a:t>
+            </a:r>
+          </a:p>
+          <a:p>
+            <a:pPr lvl="1"/>
+            <a:r>
+              <a:rPr sz="2000" b="0">
+                <a:solidFill>
+                  <a:srgbClr val="222222"/>
+                </a:solidFill>
+                <a:latin typeface="Calibri"/>
+              </a:rPr>
+              <a:t>Final rotation: each group returns to its original sheet and drafts a two-sentence justified conclusion with a condition ('Automate, but only if...').</a:t>
+            </a:r>
+          </a:p>
+          <a:p>
+            <a:pPr lvl="1"/>
+            <a:r>
+              <a:rPr sz="2000" b="0">
+                <a:solidFill>
+                  <a:srgbClr val="222222"/>
+                </a:solidFill>
+                <a:latin typeface="Calibri"/>
+              </a:rPr>
+              <a:t>Debrief aloud: class votes for the conclusion that best balances the stakeholders.</a:t>
+            </a:r>
+          </a:p>
+          <a:p>
+            <a:pPr/>
+            <a:r>
+              <a:rPr sz="1800" b="0">
                 <a:solidFill>
                   <a:srgbClr val="B76E00"/>
                 </a:solidFill>
                 <a:latin typeface="Calibri"/>
               </a:rPr>
-              <a:t>Answer: Benefit: fast, consistent and handles huge data without fatigue. Drawback: lacks empathy/judgement, hard to appeal, and liability is unclear.</a:t>
-            </a:r>
-          </a:p>
-          <a:p>
+              <a:t>Stretch: Require every third contribution to be a counter to an existing point, or add a sixth sheet: who is liable when it gets one wrong?</a:t>
+            </a:r>
+          </a:p>
+        </p:txBody>
+      </p:sp>
+    </p:spTree>
+  </p:cSld>
+  <p:clrMapOvr>
+    <a:masterClrMapping/>
+  </p:clrMapOvr>
+</p:sld>
+</file>
+
+<file path=ppt/slides/slide19.xml><?xml version="1.0" encoding="utf-8"?>
+<p:sld xmlns:a="http://schemas.openxmlformats.org/drawingml/2006/main" xmlns:p="http://schemas.openxmlformats.org/presentationml/2006/main" xmlns:r="http://schemas.openxmlformats.org/officeDocument/2006/relationships">
+  <p:cSld>
+    <p:bg>
+      <p:bgPr>
+        <a:solidFill>
+          <a:srgbClr val="FFFFFF"/>
+        </a:solidFill>
+        <a:effectLst/>
+      </p:bgPr>
+    </p:bg>
+    <p:spTree>
+      <p:nvGrpSpPr>
+        <p:cNvPr id="1" name=""/>
+        <p:cNvGrpSpPr/>
+        <p:nvPr/>
+      </p:nvGrpSpPr>
+      <p:grpSpPr/>
+      <p:sp>
+        <p:nvSpPr>
+          <p:cNvPr id="2" name="TextBox 1"/>
+          <p:cNvSpPr txBox="1"/>
+          <p:nvPr/>
+        </p:nvSpPr>
+        <p:spPr>
+          <a:xfrm>
+            <a:off x="548640" y="274320"/>
+            <a:ext cx="11064240" cy="822960"/>
+          </a:xfrm>
+          <a:prstGeom prst="rect">
+            <a:avLst/>
+          </a:prstGeom>
+          <a:noFill/>
+        </p:spPr>
+        <p:txBody>
+          <a:bodyPr wrap="square">
+            <a:spAutoFit/>
+          </a:bodyPr>
+          <a:lstStyle/>
+          <a:p>
+            <a:r>
+              <a:rPr sz="3000" b="1" i="0">
+                <a:solidFill>
+                  <a:srgbClr val="2B6CB0"/>
+                </a:solidFill>
+                <a:latin typeface="Calibri"/>
+              </a:rPr>
+              <a:t>Activity 2</a:t>
+            </a:r>
+          </a:p>
+        </p:txBody>
+      </p:sp>
+      <p:sp>
+        <p:nvSpPr>
+          <p:cNvPr id="3" name="TextBox 2"/>
+          <p:cNvSpPr txBox="1"/>
+          <p:nvPr/>
+        </p:nvSpPr>
+        <p:spPr>
+          <a:xfrm>
+            <a:off x="640080" y="1280160"/>
+            <a:ext cx="10881360" cy="5120640"/>
+          </a:xfrm>
+          <a:prstGeom prst="rect">
+            <a:avLst/>
+          </a:prstGeom>
+          <a:noFill/>
+        </p:spPr>
+        <p:txBody>
+          <a:bodyPr wrap="square">
+            <a:spAutoFit/>
+          </a:bodyPr>
+          <a:lstStyle/>
+          <a:p>
+            <a:pPr/>
             <a:r>
               <a:rPr sz="2200" b="1">
                 <a:solidFill>
-                  <a:srgbClr val="222222"/>
-                </a:solidFill>
-                <a:latin typeface="Calibri"/>
-              </a:rPr>
-              <a:t>2. What three things must a Level 3 'discuss' answer contain?</a:t>
+                  <a:srgbClr val="2B6CB0"/>
+                </a:solidFill>
+                <a:latin typeface="Calibri"/>
+              </a:rPr>
+              <a:t>The ethics line  (20 min)</a:t>
             </a:r>
           </a:p>
           <a:p>
             <a:pPr lvl="1"/>
             <a:r>
-              <a:rPr sz="1800" i="1">
+              <a:rPr sz="2000" b="0">
+                <a:solidFill>
+                  <a:srgbClr val="222222"/>
+                </a:solidFill>
+                <a:latin typeface="Calibri"/>
+              </a:rPr>
+              <a:t>Masking-tape line across the room, Strongly agree to Strongly disagree; students stand at the point matching their view as statements are read.</a:t>
+            </a:r>
+          </a:p>
+          <a:p>
+            <a:pPr lvl="1"/>
+            <a:r>
+              <a:rPr sz="2000" b="0">
+                <a:solidFill>
+                  <a:srgbClr val="222222"/>
+                </a:solidFill>
+                <a:latin typeface="Calibri"/>
+              </a:rPr>
+              <a:t>Statements: a supermarket should replace all staffed tills; governments should be able to read encrypted messages to fight terrorism; platforms should remove content they judge harmful; companies may offshore work if it keeps prices low; training an AI model is worth its energy cost.</a:t>
+            </a:r>
+          </a:p>
+          <a:p>
+            <a:pPr lvl="1"/>
+            <a:r>
+              <a:rPr sz="2000" b="0">
+                <a:solidFill>
+                  <a:srgbClr val="222222"/>
+                </a:solidFill>
+                <a:latin typeface="Calibri"/>
+              </a:rPr>
+              <a:t>Interview students at different points: justify your position naming one stakeholder who benefits and one who is harmed.</a:t>
+            </a:r>
+          </a:p>
+          <a:p>
+            <a:pPr lvl="1"/>
+            <a:r>
+              <a:rPr sz="2000" b="0">
+                <a:solidFill>
+                  <a:srgbClr val="222222"/>
+                </a:solidFill>
+                <a:latin typeface="Calibri"/>
+              </a:rPr>
+              <a:t>Add a complicating fact (the supermarket funds retraining; the interception power was misused last year, and ask which Act that engages); students may move but must explain what changed their mind.</a:t>
+            </a:r>
+          </a:p>
+          <a:p>
+            <a:pPr lvl="1"/>
+            <a:r>
+              <a:rPr sz="2000" b="0">
+                <a:solidFill>
+                  <a:srgbClr val="222222"/>
+                </a:solidFill>
+                <a:latin typeface="Calibri"/>
+              </a:rPr>
+              <a:t>One-minute write to finish: the strongest argument against my own position is...</a:t>
+            </a:r>
+          </a:p>
+          <a:p>
+            <a:pPr/>
+            <a:r>
+              <a:rPr sz="1800" b="0">
                 <a:solidFill>
                   <a:srgbClr val="B76E00"/>
                 </a:solidFill>
                 <a:latin typeface="Calibri"/>
               </a:rPr>
-              <a:t>Answer: Both benefits and drawbacks, multiple named stakeholders with developed/sustained reasoning, and a justified conclusion that takes a position.</a:t>
-            </a:r>
-          </a:p>
-          <a:p>
-            <a:r>
-              <a:rPr sz="2200" b="1">
-                <a:solidFill>
-                  <a:srgbClr val="222222"/>
-                </a:solidFill>
-                <a:latin typeface="Calibri"/>
-              </a:rPr>
-              <a:t>3. State one benefit and one drawback of mass surveillance.</a:t>
-            </a:r>
-          </a:p>
-          <a:p>
-            <a:pPr lvl="1"/>
-            <a:r>
-              <a:rPr sz="1800" i="1">
-                <a:solidFill>
-                  <a:srgbClr val="B76E00"/>
-                </a:solidFill>
-                <a:latin typeface="Calibri"/>
-              </a:rPr>
-              <a:t>Answer: Benefit: helps prevent or detect crime and terrorism. Drawback: loss of privacy, profiling or a chilling effect on free expression.</a:t>
+              <a:t>Stretch: Appoint two continuum lawyers who may challenge any student with one question per round; the challenged student must respond or move.</a:t>
             </a:r>
           </a:p>
         </p:txBody>
@@ -3866,7 +4891,7 @@
                 </a:solidFill>
                 <a:latin typeface="Calibri"/>
               </a:rPr>
-              <a:t>Describe the key moral, ethical, cultural and social issues raised by computing, identifying both a benefit and a drawback for each.</a:t>
+              <a:t>I can describe the benefits and harms of each named issue area, from workforce automation to character sets.</a:t>
             </a:r>
           </a:p>
           <a:p>
@@ -3878,7 +4903,7 @@
                 </a:solidFill>
                 <a:latin typeface="Calibri"/>
               </a:rPr>
-              <a:t>Identify the stakeholders affected by a computing decision and explain how the same fact can benefit one group while harming another.</a:t>
+              <a:t>I can identify the stakeholders in a computing decision and explain how one fact helps one group while harming another.</a:t>
             </a:r>
           </a:p>
           <a:p>
@@ -3890,7 +4915,1462 @@
                 </a:solidFill>
                 <a:latin typeface="Calibri"/>
               </a:rPr>
-              <a:t>Structure a balanced levels-of-response 'discuss' answer that weighs both sides and reaches a justified conclusion.</a:t>
+              <a:t>I can plan a levels-of-response 'discuss' answer: stakeholders, developed points both ways, weighed conclusion.</a:t>
+            </a:r>
+          </a:p>
+          <a:p>
+            <a:pPr lvl="1"/>
+            <a:r>
+              <a:rPr sz="2200" b="0">
+                <a:solidFill>
+                  <a:srgbClr val="222222"/>
+                </a:solidFill>
+                <a:latin typeface="Calibri"/>
+              </a:rPr>
+              <a:t>I can link ethical issues to the legislation from 1.5.1 where relevant, such as monitoring to RIPA and profiling to the DPA.</a:t>
+            </a:r>
+          </a:p>
+        </p:txBody>
+      </p:sp>
+    </p:spTree>
+  </p:cSld>
+  <p:clrMapOvr>
+    <a:masterClrMapping/>
+  </p:clrMapOvr>
+</p:sld>
+</file>
+
+<file path=ppt/slides/slide20.xml><?xml version="1.0" encoding="utf-8"?>
+<p:sld xmlns:a="http://schemas.openxmlformats.org/drawingml/2006/main" xmlns:p="http://schemas.openxmlformats.org/presentationml/2006/main" xmlns:r="http://schemas.openxmlformats.org/officeDocument/2006/relationships">
+  <p:cSld>
+    <p:bg>
+      <p:bgPr>
+        <a:solidFill>
+          <a:srgbClr val="FFFFFF"/>
+        </a:solidFill>
+        <a:effectLst/>
+      </p:bgPr>
+    </p:bg>
+    <p:spTree>
+      <p:nvGrpSpPr>
+        <p:cNvPr id="1" name=""/>
+        <p:cNvGrpSpPr/>
+        <p:nvPr/>
+      </p:nvGrpSpPr>
+      <p:grpSpPr/>
+      <p:sp>
+        <p:nvSpPr>
+          <p:cNvPr id="2" name="TextBox 1"/>
+          <p:cNvSpPr txBox="1"/>
+          <p:nvPr/>
+        </p:nvSpPr>
+        <p:spPr>
+          <a:xfrm>
+            <a:off x="548640" y="274320"/>
+            <a:ext cx="11064240" cy="822960"/>
+          </a:xfrm>
+          <a:prstGeom prst="rect">
+            <a:avLst/>
+          </a:prstGeom>
+          <a:noFill/>
+        </p:spPr>
+        <p:txBody>
+          <a:bodyPr wrap="square">
+            <a:spAutoFit/>
+          </a:bodyPr>
+          <a:lstStyle/>
+          <a:p>
+            <a:r>
+              <a:rPr sz="3000" b="1" i="0">
+                <a:solidFill>
+                  <a:srgbClr val="2B6CB0"/>
+                </a:solidFill>
+                <a:latin typeface="Calibri"/>
+              </a:rPr>
+              <a:t>Activity 3</a:t>
+            </a:r>
+          </a:p>
+        </p:txBody>
+      </p:sp>
+      <p:sp>
+        <p:nvSpPr>
+          <p:cNvPr id="3" name="TextBox 2"/>
+          <p:cNvSpPr txBox="1"/>
+          <p:nvPr/>
+        </p:nvSpPr>
+        <p:spPr>
+          <a:xfrm>
+            <a:off x="640080" y="1280160"/>
+            <a:ext cx="10881360" cy="5120640"/>
+          </a:xfrm>
+          <a:prstGeom prst="rect">
+            <a:avLst/>
+          </a:prstGeom>
+          <a:noFill/>
+        </p:spPr>
+        <p:txBody>
+          <a:bodyPr wrap="square">
+            <a:spAutoFit/>
+          </a:bodyPr>
+          <a:lstStyle/>
+          <a:p>
+            <a:pPr/>
+            <a:r>
+              <a:rPr sz="2200" b="1">
+                <a:solidFill>
+                  <a:srgbClr val="2B6CB0"/>
+                </a:solidFill>
+                <a:latin typeface="Calibri"/>
+              </a:rPr>
+              <a:t>Balloon debate: save the technology  (25 min)</a:t>
+            </a:r>
+          </a:p>
+          <a:p>
+            <a:pPr lvl="1"/>
+            <a:r>
+              <a:rPr sz="2000" b="0">
+                <a:solidFill>
+                  <a:srgbClr val="222222"/>
+                </a:solidFill>
+                <a:latin typeface="Calibri"/>
+              </a:rPr>
+              <a:t>Six technology cards: facial-recognition policing, recommendation algorithms, warehouse robots, cryptocurrency, targeted advertising, AI medical diagnosis. Society's balloon is sinking: only two survive.</a:t>
+            </a:r>
+          </a:p>
+          <a:p>
+            <a:pPr lvl="1"/>
+            <a:r>
+              <a:rPr sz="2000" b="0">
+                <a:solidFill>
+                  <a:srgbClr val="222222"/>
+                </a:solidFill>
+                <a:latin typeface="Calibri"/>
+              </a:rPr>
+              <a:t>Trios build the strongest honest case for their technology: benefits, who gains, plus a pre-emptive rebuttal of its best-known harm, which they must name themselves.</a:t>
+            </a:r>
+          </a:p>
+          <a:p>
+            <a:pPr lvl="1"/>
+            <a:r>
+              <a:rPr sz="2000" b="0">
+                <a:solidFill>
+                  <a:srgbClr val="222222"/>
+                </a:solidFill>
+                <a:latin typeface="Calibri"/>
+              </a:rPr>
+              <a:t>Each trio pleads for 90 seconds and takes one question from the floor.</a:t>
+            </a:r>
+          </a:p>
+          <a:p>
+            <a:pPr lvl="1"/>
+            <a:r>
+              <a:rPr sz="2000" b="0">
+                <a:solidFill>
+                  <a:srgbClr val="222222"/>
+                </a:solidFill>
+                <a:latin typeface="Calibri"/>
+              </a:rPr>
+              <a:t>Two elimination votes; no voting for your own. Eliminated teams may donate a dying argument to a survivor.</a:t>
+            </a:r>
+          </a:p>
+          <a:p>
+            <a:pPr lvl="1"/>
+            <a:r>
+              <a:rPr sz="2000" b="0">
+                <a:solidFill>
+                  <a:srgbClr val="222222"/>
+                </a:solidFill>
+                <a:latin typeface="Calibri"/>
+              </a:rPr>
+              <a:t>Debrief: which pleas moved votes, emotional appeals or stakeholder-plus-consequence reasoning?</a:t>
+            </a:r>
+          </a:p>
+          <a:p>
+            <a:pPr/>
+            <a:r>
+              <a:rPr sz="1800" b="0">
+                <a:solidFill>
+                  <a:srgbClr val="B76E00"/>
+                </a:solidFill>
+                <a:latin typeface="Calibri"/>
+              </a:rPr>
+              <a:t>Stretch: Require each plea to cite one law from 1.5.1 that constrains, or should constrain, their technology.</a:t>
+            </a:r>
+          </a:p>
+        </p:txBody>
+      </p:sp>
+    </p:spTree>
+  </p:cSld>
+  <p:clrMapOvr>
+    <a:masterClrMapping/>
+  </p:clrMapOvr>
+</p:sld>
+</file>
+
+<file path=ppt/slides/slide21.xml><?xml version="1.0" encoding="utf-8"?>
+<p:sld xmlns:a="http://schemas.openxmlformats.org/drawingml/2006/main" xmlns:p="http://schemas.openxmlformats.org/presentationml/2006/main" xmlns:r="http://schemas.openxmlformats.org/officeDocument/2006/relationships">
+  <p:cSld>
+    <p:bg>
+      <p:bgPr>
+        <a:solidFill>
+          <a:srgbClr val="FFFFFF"/>
+        </a:solidFill>
+        <a:effectLst/>
+      </p:bgPr>
+    </p:bg>
+    <p:spTree>
+      <p:nvGrpSpPr>
+        <p:cNvPr id="1" name=""/>
+        <p:cNvGrpSpPr/>
+        <p:nvPr/>
+      </p:nvGrpSpPr>
+      <p:grpSpPr/>
+      <p:sp>
+        <p:nvSpPr>
+          <p:cNvPr id="2" name="TextBox 1"/>
+          <p:cNvSpPr txBox="1"/>
+          <p:nvPr/>
+        </p:nvSpPr>
+        <p:spPr>
+          <a:xfrm>
+            <a:off x="548640" y="274320"/>
+            <a:ext cx="11064240" cy="822960"/>
+          </a:xfrm>
+          <a:prstGeom prst="rect">
+            <a:avLst/>
+          </a:prstGeom>
+          <a:noFill/>
+        </p:spPr>
+        <p:txBody>
+          <a:bodyPr wrap="square">
+            <a:spAutoFit/>
+          </a:bodyPr>
+          <a:lstStyle/>
+          <a:p>
+            <a:r>
+              <a:rPr sz="3000" b="1" i="0">
+                <a:solidFill>
+                  <a:srgbClr val="2B6CB0"/>
+                </a:solidFill>
+                <a:latin typeface="Calibri"/>
+              </a:rPr>
+              <a:t>Practice (1-4)</a:t>
+            </a:r>
+          </a:p>
+        </p:txBody>
+      </p:sp>
+      <p:sp>
+        <p:nvSpPr>
+          <p:cNvPr id="3" name="TextBox 2"/>
+          <p:cNvSpPr txBox="1"/>
+          <p:nvPr/>
+        </p:nvSpPr>
+        <p:spPr>
+          <a:xfrm>
+            <a:off x="640080" y="1280160"/>
+            <a:ext cx="10881360" cy="5120640"/>
+          </a:xfrm>
+          <a:prstGeom prst="rect">
+            <a:avLst/>
+          </a:prstGeom>
+          <a:noFill/>
+        </p:spPr>
+        <p:txBody>
+          <a:bodyPr wrap="square">
+            <a:spAutoFit/>
+          </a:bodyPr>
+          <a:lstStyle/>
+          <a:p>
+            <a:r>
+              <a:rPr sz="2000" b="1">
+                <a:solidFill>
+                  <a:srgbClr val="222222"/>
+                </a:solidFill>
+                <a:latin typeface="Calibri"/>
+              </a:rPr>
+              <a:t>1. Describe two environmental harms caused by the increasing use of computing devices. [2]</a:t>
+            </a:r>
+          </a:p>
+          <a:p>
+            <a:r>
+              <a:rPr sz="2000" b="1">
+                <a:solidFill>
+                  <a:srgbClr val="222222"/>
+                </a:solidFill>
+                <a:latin typeface="Calibri"/>
+              </a:rPr>
+              <a:t>2. Explain one benefit and one drawback of internet censorship. [4]</a:t>
+            </a:r>
+          </a:p>
+          <a:p>
+            <a:r>
+              <a:rPr sz="2000" b="1">
+                <a:solidFill>
+                  <a:srgbClr val="222222"/>
+                </a:solidFill>
+                <a:latin typeface="Calibri"/>
+              </a:rPr>
+              <a:t>3. An AI recruitment system trained on a company's past hiring decisions rejects a disproportionate number of female applicants. Explain why this happens. [3]</a:t>
+            </a:r>
+          </a:p>
+          <a:p>
+            <a:r>
+              <a:rPr sz="2000" b="1">
+                <a:solidFill>
+                  <a:srgbClr val="222222"/>
+                </a:solidFill>
+                <a:latin typeface="Calibri"/>
+              </a:rPr>
+              <a:t>4. State two reasons a website designer should not rely on colour alone to convey information. [2]</a:t>
+            </a:r>
+          </a:p>
+        </p:txBody>
+      </p:sp>
+    </p:spTree>
+  </p:cSld>
+  <p:clrMapOvr>
+    <a:masterClrMapping/>
+  </p:clrMapOvr>
+</p:sld>
+</file>
+
+<file path=ppt/slides/slide22.xml><?xml version="1.0" encoding="utf-8"?>
+<p:sld xmlns:a="http://schemas.openxmlformats.org/drawingml/2006/main" xmlns:p="http://schemas.openxmlformats.org/presentationml/2006/main" xmlns:r="http://schemas.openxmlformats.org/officeDocument/2006/relationships">
+  <p:cSld>
+    <p:bg>
+      <p:bgPr>
+        <a:solidFill>
+          <a:srgbClr val="FFFFFF"/>
+        </a:solidFill>
+        <a:effectLst/>
+      </p:bgPr>
+    </p:bg>
+    <p:spTree>
+      <p:nvGrpSpPr>
+        <p:cNvPr id="1" name=""/>
+        <p:cNvGrpSpPr/>
+        <p:nvPr/>
+      </p:nvGrpSpPr>
+      <p:grpSpPr/>
+      <p:sp>
+        <p:nvSpPr>
+          <p:cNvPr id="2" name="TextBox 1"/>
+          <p:cNvSpPr txBox="1"/>
+          <p:nvPr/>
+        </p:nvSpPr>
+        <p:spPr>
+          <a:xfrm>
+            <a:off x="548640" y="274320"/>
+            <a:ext cx="11064240" cy="822960"/>
+          </a:xfrm>
+          <a:prstGeom prst="rect">
+            <a:avLst/>
+          </a:prstGeom>
+          <a:noFill/>
+        </p:spPr>
+        <p:txBody>
+          <a:bodyPr wrap="square">
+            <a:spAutoFit/>
+          </a:bodyPr>
+          <a:lstStyle/>
+          <a:p>
+            <a:r>
+              <a:rPr sz="3000" b="1" i="0">
+                <a:solidFill>
+                  <a:srgbClr val="2B6CB0"/>
+                </a:solidFill>
+                <a:latin typeface="Calibri"/>
+              </a:rPr>
+              <a:t>Practice — answers (1-4)</a:t>
+            </a:r>
+          </a:p>
+        </p:txBody>
+      </p:sp>
+      <p:sp>
+        <p:nvSpPr>
+          <p:cNvPr id="3" name="TextBox 2"/>
+          <p:cNvSpPr txBox="1"/>
+          <p:nvPr/>
+        </p:nvSpPr>
+        <p:spPr>
+          <a:xfrm>
+            <a:off x="640080" y="1280160"/>
+            <a:ext cx="10881360" cy="5120640"/>
+          </a:xfrm>
+          <a:prstGeom prst="rect">
+            <a:avLst/>
+          </a:prstGeom>
+          <a:noFill/>
+        </p:spPr>
+        <p:txBody>
+          <a:bodyPr wrap="square">
+            <a:spAutoFit/>
+          </a:bodyPr>
+          <a:lstStyle/>
+          <a:p>
+            <a:r>
+              <a:rPr sz="2000" b="1">
+                <a:solidFill>
+                  <a:srgbClr val="222222"/>
+                </a:solidFill>
+                <a:latin typeface="Calibri"/>
+              </a:rPr>
+              <a:t>1. Describe two environmental harms caused by the increasing use of computing devices. [2]</a:t>
+            </a:r>
+          </a:p>
+          <a:p>
+            <a:pPr lvl="1"/>
+            <a:r>
+              <a:rPr sz="1800" i="1">
+                <a:solidFill>
+                  <a:srgbClr val="B76E00"/>
+                </a:solidFill>
+                <a:latin typeface="Calibri"/>
+              </a:rPr>
+              <a:t>Answer: Any two: e-waste from discarded devices containing toxic and unrecycled materials (1); large energy or water consumption by data centres (1); environmental damage from mining rare-earth metals for components (1).</a:t>
+            </a:r>
+          </a:p>
+          <a:p>
+            <a:r>
+              <a:rPr sz="2000" b="1">
+                <a:solidFill>
+                  <a:srgbClr val="222222"/>
+                </a:solidFill>
+                <a:latin typeface="Calibri"/>
+              </a:rPr>
+              <a:t>2. Explain one benefit and one drawback of internet censorship. [4]</a:t>
+            </a:r>
+          </a:p>
+          <a:p>
+            <a:pPr lvl="1"/>
+            <a:r>
+              <a:rPr sz="1800" i="1">
+                <a:solidFill>
+                  <a:srgbClr val="B76E00"/>
+                </a:solidFill>
+                <a:latin typeface="Calibri"/>
+              </a:rPr>
+              <a:t>Answer: Benefit: it can block illegal or harmful material (1), protecting vulnerable users such as children (1). Drawback: it restricts freedom of speech and can overblock legitimate content (1), and states can abuse it to silence criticism and control information (1).</a:t>
+            </a:r>
+          </a:p>
+          <a:p>
+            <a:r>
+              <a:rPr sz="2000" b="1">
+                <a:solidFill>
+                  <a:srgbClr val="222222"/>
+                </a:solidFill>
+                <a:latin typeface="Calibri"/>
+              </a:rPr>
+              <a:t>3. An AI recruitment system trained on a company's past hiring decisions rejects a disproportionate number of female applicants. Explain why this happens. [3]</a:t>
+            </a:r>
+          </a:p>
+          <a:p>
+            <a:pPr lvl="1"/>
+            <a:r>
+              <a:rPr sz="1800" i="1">
+                <a:solidFill>
+                  <a:srgbClr val="B76E00"/>
+                </a:solidFill>
+                <a:latin typeface="Calibri"/>
+              </a:rPr>
+              <a:t>Answer: The AI learns patterns from its training data (1); past hiring decisions contained bias, for example fewer women hired (1); the system reproduces and applies that bias consistently to new applicants, amplifying it at scale (1).</a:t>
+            </a:r>
+          </a:p>
+          <a:p>
+            <a:r>
+              <a:rPr sz="2000" b="1">
+                <a:solidFill>
+                  <a:srgbClr val="222222"/>
+                </a:solidFill>
+                <a:latin typeface="Calibri"/>
+              </a:rPr>
+              <a:t>4. State two reasons a website designer should not rely on colour alone to convey information. [2]</a:t>
+            </a:r>
+          </a:p>
+          <a:p>
+            <a:pPr lvl="1"/>
+            <a:r>
+              <a:rPr sz="1800" i="1">
+                <a:solidFill>
+                  <a:srgbClr val="B76E00"/>
+                </a:solidFill>
+                <a:latin typeface="Calibri"/>
+              </a:rPr>
+              <a:t>Answer: Colour-blind or visually impaired users may not perceive the difference (1); colours carry different cultural meanings, so the intended message may not translate internationally (1).</a:t>
+            </a:r>
+          </a:p>
+        </p:txBody>
+      </p:sp>
+    </p:spTree>
+  </p:cSld>
+  <p:clrMapOvr>
+    <a:masterClrMapping/>
+  </p:clrMapOvr>
+</p:sld>
+</file>
+
+<file path=ppt/slides/slide23.xml><?xml version="1.0" encoding="utf-8"?>
+<p:sld xmlns:a="http://schemas.openxmlformats.org/drawingml/2006/main" xmlns:p="http://schemas.openxmlformats.org/presentationml/2006/main" xmlns:r="http://schemas.openxmlformats.org/officeDocument/2006/relationships">
+  <p:cSld>
+    <p:bg>
+      <p:bgPr>
+        <a:solidFill>
+          <a:srgbClr val="FFFFFF"/>
+        </a:solidFill>
+        <a:effectLst/>
+      </p:bgPr>
+    </p:bg>
+    <p:spTree>
+      <p:nvGrpSpPr>
+        <p:cNvPr id="1" name=""/>
+        <p:cNvGrpSpPr/>
+        <p:nvPr/>
+      </p:nvGrpSpPr>
+      <p:grpSpPr/>
+      <p:sp>
+        <p:nvSpPr>
+          <p:cNvPr id="2" name="TextBox 1"/>
+          <p:cNvSpPr txBox="1"/>
+          <p:nvPr/>
+        </p:nvSpPr>
+        <p:spPr>
+          <a:xfrm>
+            <a:off x="548640" y="274320"/>
+            <a:ext cx="11064240" cy="822960"/>
+          </a:xfrm>
+          <a:prstGeom prst="rect">
+            <a:avLst/>
+          </a:prstGeom>
+          <a:noFill/>
+        </p:spPr>
+        <p:txBody>
+          <a:bodyPr wrap="square">
+            <a:spAutoFit/>
+          </a:bodyPr>
+          <a:lstStyle/>
+          <a:p>
+            <a:r>
+              <a:rPr sz="3000" b="1" i="0">
+                <a:solidFill>
+                  <a:srgbClr val="2B6CB0"/>
+                </a:solidFill>
+                <a:latin typeface="Calibri"/>
+              </a:rPr>
+              <a:t>Practice (5-8)</a:t>
+            </a:r>
+          </a:p>
+        </p:txBody>
+      </p:sp>
+      <p:sp>
+        <p:nvSpPr>
+          <p:cNvPr id="3" name="TextBox 2"/>
+          <p:cNvSpPr txBox="1"/>
+          <p:nvPr/>
+        </p:nvSpPr>
+        <p:spPr>
+          <a:xfrm>
+            <a:off x="640080" y="1280160"/>
+            <a:ext cx="10881360" cy="5120640"/>
+          </a:xfrm>
+          <a:prstGeom prst="rect">
+            <a:avLst/>
+          </a:prstGeom>
+          <a:noFill/>
+        </p:spPr>
+        <p:txBody>
+          <a:bodyPr wrap="square">
+            <a:spAutoFit/>
+          </a:bodyPr>
+          <a:lstStyle/>
+          <a:p>
+            <a:r>
+              <a:rPr sz="2000" b="1">
+                <a:solidFill>
+                  <a:srgbClr val="222222"/>
+                </a:solidFill>
+                <a:latin typeface="Calibri"/>
+              </a:rPr>
+              <a:t>1. Explain why the adoption of Unicode was important for computer users outside the English-speaking world. [2]</a:t>
+            </a:r>
+          </a:p>
+          <a:p>
+            <a:r>
+              <a:rPr sz="2000" b="1">
+                <a:solidFill>
+                  <a:srgbClr val="222222"/>
+                </a:solidFill>
+                <a:latin typeface="Calibri"/>
+              </a:rPr>
+              <a:t>2. Describe one way an employer might monitor employees and explain one ethical concern this raises. [3]</a:t>
+            </a:r>
+          </a:p>
+          <a:p>
+            <a:r>
+              <a:rPr sz="2000" b="1">
+                <a:solidFill>
+                  <a:srgbClr val="222222"/>
+                </a:solidFill>
+                <a:latin typeface="Calibri"/>
+              </a:rPr>
+              <a:t>3. Explain the tension between using DRM to reduce software piracy and the interests of legitimate customers. [3]</a:t>
+            </a:r>
+          </a:p>
+          <a:p>
+            <a:r>
+              <a:rPr sz="2000" b="1">
+                <a:solidFill>
+                  <a:srgbClr val="222222"/>
+                </a:solidFill>
+                <a:latin typeface="Calibri"/>
+              </a:rPr>
+              <a:t>4. Discuss the impact of increased automation on the workforce. [9]</a:t>
+            </a:r>
+          </a:p>
+        </p:txBody>
+      </p:sp>
+    </p:spTree>
+  </p:cSld>
+  <p:clrMapOvr>
+    <a:masterClrMapping/>
+  </p:clrMapOvr>
+</p:sld>
+</file>
+
+<file path=ppt/slides/slide24.xml><?xml version="1.0" encoding="utf-8"?>
+<p:sld xmlns:a="http://schemas.openxmlformats.org/drawingml/2006/main" xmlns:p="http://schemas.openxmlformats.org/presentationml/2006/main" xmlns:r="http://schemas.openxmlformats.org/officeDocument/2006/relationships">
+  <p:cSld>
+    <p:bg>
+      <p:bgPr>
+        <a:solidFill>
+          <a:srgbClr val="FFFFFF"/>
+        </a:solidFill>
+        <a:effectLst/>
+      </p:bgPr>
+    </p:bg>
+    <p:spTree>
+      <p:nvGrpSpPr>
+        <p:cNvPr id="1" name=""/>
+        <p:cNvGrpSpPr/>
+        <p:nvPr/>
+      </p:nvGrpSpPr>
+      <p:grpSpPr/>
+      <p:sp>
+        <p:nvSpPr>
+          <p:cNvPr id="2" name="TextBox 1"/>
+          <p:cNvSpPr txBox="1"/>
+          <p:nvPr/>
+        </p:nvSpPr>
+        <p:spPr>
+          <a:xfrm>
+            <a:off x="548640" y="274320"/>
+            <a:ext cx="11064240" cy="822960"/>
+          </a:xfrm>
+          <a:prstGeom prst="rect">
+            <a:avLst/>
+          </a:prstGeom>
+          <a:noFill/>
+        </p:spPr>
+        <p:txBody>
+          <a:bodyPr wrap="square">
+            <a:spAutoFit/>
+          </a:bodyPr>
+          <a:lstStyle/>
+          <a:p>
+            <a:r>
+              <a:rPr sz="3000" b="1" i="0">
+                <a:solidFill>
+                  <a:srgbClr val="2B6CB0"/>
+                </a:solidFill>
+                <a:latin typeface="Calibri"/>
+              </a:rPr>
+              <a:t>Practice — answers (5-8)</a:t>
+            </a:r>
+          </a:p>
+        </p:txBody>
+      </p:sp>
+      <p:sp>
+        <p:nvSpPr>
+          <p:cNvPr id="3" name="TextBox 2"/>
+          <p:cNvSpPr txBox="1"/>
+          <p:nvPr/>
+        </p:nvSpPr>
+        <p:spPr>
+          <a:xfrm>
+            <a:off x="640080" y="1280160"/>
+            <a:ext cx="10881360" cy="5120640"/>
+          </a:xfrm>
+          <a:prstGeom prst="rect">
+            <a:avLst/>
+          </a:prstGeom>
+          <a:noFill/>
+        </p:spPr>
+        <p:txBody>
+          <a:bodyPr wrap="square">
+            <a:spAutoFit/>
+          </a:bodyPr>
+          <a:lstStyle/>
+          <a:p>
+            <a:r>
+              <a:rPr sz="2000" b="1">
+                <a:solidFill>
+                  <a:srgbClr val="222222"/>
+                </a:solidFill>
+                <a:latin typeface="Calibri"/>
+              </a:rPr>
+              <a:t>1. Explain why the adoption of Unicode was important for computer users outside the English-speaking world. [2]</a:t>
+            </a:r>
+          </a:p>
+          <a:p>
+            <a:pPr lvl="1"/>
+            <a:r>
+              <a:rPr sz="1800" i="1">
+                <a:solidFill>
+                  <a:srgbClr val="B76E00"/>
+                </a:solidFill>
+                <a:latin typeface="Calibri"/>
+              </a:rPr>
+              <a:t>Answer: ASCII only encodes Latin characters, so other scripts could not be represented (1); Unicode assigns code points to the characters of the world's major writing systems, letting software display and process any language (1).</a:t>
+            </a:r>
+          </a:p>
+          <a:p>
+            <a:r>
+              <a:rPr sz="2000" b="1">
+                <a:solidFill>
+                  <a:srgbClr val="222222"/>
+                </a:solidFill>
+                <a:latin typeface="Calibri"/>
+              </a:rPr>
+              <a:t>2. Describe one way an employer might monitor employees and explain one ethical concern this raises. [3]</a:t>
+            </a:r>
+          </a:p>
+          <a:p>
+            <a:pPr lvl="1"/>
+            <a:r>
+              <a:rPr sz="1800" i="1">
+                <a:solidFill>
+                  <a:srgbClr val="B76E00"/>
+                </a:solidFill>
+                <a:latin typeface="Calibri"/>
+              </a:rPr>
+              <a:t>Answer: Example: logging emails, web use or keystrokes on work machines (1). Concern: it invades employees' privacy and may capture personal matters (1), creating stress and distrust if it is disproportionate or undeclared (1).</a:t>
+            </a:r>
+          </a:p>
+          <a:p>
+            <a:r>
+              <a:rPr sz="2000" b="1">
+                <a:solidFill>
+                  <a:srgbClr val="222222"/>
+                </a:solidFill>
+                <a:latin typeface="Calibri"/>
+              </a:rPr>
+              <a:t>3. Explain the tension between using DRM to reduce software piracy and the interests of legitimate customers. [3]</a:t>
+            </a:r>
+          </a:p>
+          <a:p>
+            <a:pPr lvl="1"/>
+            <a:r>
+              <a:rPr sz="1800" i="1">
+                <a:solidFill>
+                  <a:srgbClr val="B76E00"/>
+                </a:solidFill>
+                <a:latin typeface="Calibri"/>
+              </a:rPr>
+              <a:t>Answer: DRM restricts copying to protect the copyright holder's income (1), but it can also stop paying customers making backups, reselling, or using the product offline or on new devices (1); over-restrictive DRM can therefore push legitimate users towards pirated copies that work more freely (1).</a:t>
+            </a:r>
+          </a:p>
+          <a:p>
+            <a:r>
+              <a:rPr sz="2000" b="1">
+                <a:solidFill>
+                  <a:srgbClr val="222222"/>
+                </a:solidFill>
+                <a:latin typeface="Calibri"/>
+              </a:rPr>
+              <a:t>4. Discuss the impact of increased automation on the workforce. [9]</a:t>
+            </a:r>
+          </a:p>
+          <a:p>
+            <a:pPr lvl="1"/>
+            <a:r>
+              <a:rPr sz="1800" i="1">
+                <a:solidFill>
+                  <a:srgbClr val="B76E00"/>
+                </a:solidFill>
+                <a:latin typeface="Calibri"/>
+              </a:rPr>
+              <a:t>Answer: Indicative content. For: higher productivity and lower prices; machines take dangerous, repetitive jobs; new roles created in development and maintenance; businesses stay competitive. Against: displacement of low-skilled workers; deskilling; benefits flow to owners while costs (unemployment, retraining) fall on individuals and society; regional impacts where one employer dominates. Stakeholders: workers, employers, consumers, government, society. Level 3 (7-9) requires both sides developed with named stakeholders and a justified conclusion, e.g. acceptable where retraining and transition support accompany automation; one-sided or undeveloped answers reach Level 1-2.</a:t>
+            </a:r>
+          </a:p>
+        </p:txBody>
+      </p:sp>
+    </p:spTree>
+  </p:cSld>
+  <p:clrMapOvr>
+    <a:masterClrMapping/>
+  </p:clrMapOvr>
+</p:sld>
+</file>
+
+<file path=ppt/slides/slide25.xml><?xml version="1.0" encoding="utf-8"?>
+<p:sld xmlns:a="http://schemas.openxmlformats.org/drawingml/2006/main" xmlns:p="http://schemas.openxmlformats.org/presentationml/2006/main" xmlns:r="http://schemas.openxmlformats.org/officeDocument/2006/relationships">
+  <p:cSld>
+    <p:bg>
+      <p:bgPr>
+        <a:solidFill>
+          <a:srgbClr val="FFFFFF"/>
+        </a:solidFill>
+        <a:effectLst/>
+      </p:bgPr>
+    </p:bg>
+    <p:spTree>
+      <p:nvGrpSpPr>
+        <p:cNvPr id="1" name=""/>
+        <p:cNvGrpSpPr/>
+        <p:nvPr/>
+      </p:nvGrpSpPr>
+      <p:grpSpPr/>
+      <p:sp>
+        <p:nvSpPr>
+          <p:cNvPr id="2" name="TextBox 1"/>
+          <p:cNvSpPr txBox="1"/>
+          <p:nvPr/>
+        </p:nvSpPr>
+        <p:spPr>
+          <a:xfrm>
+            <a:off x="548640" y="274320"/>
+            <a:ext cx="11064240" cy="822960"/>
+          </a:xfrm>
+          <a:prstGeom prst="rect">
+            <a:avLst/>
+          </a:prstGeom>
+          <a:noFill/>
+        </p:spPr>
+        <p:txBody>
+          <a:bodyPr wrap="square">
+            <a:spAutoFit/>
+          </a:bodyPr>
+          <a:lstStyle/>
+          <a:p>
+            <a:r>
+              <a:rPr sz="3000" b="1" i="0">
+                <a:solidFill>
+                  <a:srgbClr val="2B6CB0"/>
+                </a:solidFill>
+                <a:latin typeface="Calibri"/>
+              </a:rPr>
+              <a:t>Common misconceptions</a:t>
+            </a:r>
+          </a:p>
+        </p:txBody>
+      </p:sp>
+      <p:sp>
+        <p:nvSpPr>
+          <p:cNvPr id="3" name="TextBox 2"/>
+          <p:cNvSpPr txBox="1"/>
+          <p:nvPr/>
+        </p:nvSpPr>
+        <p:spPr>
+          <a:xfrm>
+            <a:off x="640080" y="1280160"/>
+            <a:ext cx="10881360" cy="5120640"/>
+          </a:xfrm>
+          <a:prstGeom prst="rect">
+            <a:avLst/>
+          </a:prstGeom>
+          <a:noFill/>
+        </p:spPr>
+        <p:txBody>
+          <a:bodyPr wrap="square">
+            <a:spAutoFit/>
+          </a:bodyPr>
+          <a:lstStyle/>
+          <a:p>
+            <a:pPr/>
+            <a:r>
+              <a:rPr sz="2000" b="0">
+                <a:solidFill>
+                  <a:srgbClr val="222222"/>
+                </a:solidFill>
+                <a:latin typeface="Calibri"/>
+              </a:rPr>
+              <a:t>✗ Students often think a strong opinion scores well; discuss and evaluate questions reward balanced, developed argument and a justified conclusion, not passion.</a:t>
+            </a:r>
+          </a:p>
+          <a:p>
+            <a:pPr/>
+            <a:r>
+              <a:rPr sz="2000" b="0">
+                <a:solidFill>
+                  <a:srgbClr val="222222"/>
+                </a:solidFill>
+                <a:latin typeface="Calibri"/>
+              </a:rPr>
+              <a:t>✗ Students often think AI decisions are objective because a computer made them; models trained on biased data reproduce and amplify that bias.</a:t>
+            </a:r>
+          </a:p>
+          <a:p>
+            <a:pPr/>
+            <a:r>
+              <a:rPr sz="2000" b="0">
+                <a:solidFill>
+                  <a:srgbClr val="222222"/>
+                </a:solidFill>
+                <a:latin typeface="Calibri"/>
+              </a:rPr>
+              <a:t>✗ Students often list points without development; the mark comes from the chain of point, consequence, stakeholder, counter.</a:t>
+            </a:r>
+          </a:p>
+          <a:p>
+            <a:pPr/>
+            <a:r>
+              <a:rPr sz="2000" b="0">
+                <a:solidFill>
+                  <a:srgbClr val="222222"/>
+                </a:solidFill>
+                <a:latin typeface="Calibri"/>
+              </a:rPr>
+              <a:t>✗ Students often forget non-obvious stakeholders; the environment, future generations and excluded groups often unlock the strongest arguments.</a:t>
+            </a:r>
+          </a:p>
+          <a:p>
+            <a:pPr/>
+            <a:r>
+              <a:rPr sz="2000" b="0">
+                <a:solidFill>
+                  <a:srgbClr val="222222"/>
+                </a:solidFill>
+                <a:latin typeface="Calibri"/>
+              </a:rPr>
+              <a:t>✗ Students often treat character sets and colour as purely technical detail; ASCII's Latin bias and colour-blind-hostile design are ethical exclusion in practice.</a:t>
+            </a:r>
+          </a:p>
+        </p:txBody>
+      </p:sp>
+    </p:spTree>
+  </p:cSld>
+  <p:clrMapOvr>
+    <a:masterClrMapping/>
+  </p:clrMapOvr>
+</p:sld>
+</file>
+
+<file path=ppt/slides/slide26.xml><?xml version="1.0" encoding="utf-8"?>
+<p:sld xmlns:a="http://schemas.openxmlformats.org/drawingml/2006/main" xmlns:p="http://schemas.openxmlformats.org/presentationml/2006/main" xmlns:r="http://schemas.openxmlformats.org/officeDocument/2006/relationships">
+  <p:cSld>
+    <p:bg>
+      <p:bgPr>
+        <a:solidFill>
+          <a:srgbClr val="FFFFFF"/>
+        </a:solidFill>
+        <a:effectLst/>
+      </p:bgPr>
+    </p:bg>
+    <p:spTree>
+      <p:nvGrpSpPr>
+        <p:cNvPr id="1" name=""/>
+        <p:cNvGrpSpPr/>
+        <p:nvPr/>
+      </p:nvGrpSpPr>
+      <p:grpSpPr/>
+      <p:sp>
+        <p:nvSpPr>
+          <p:cNvPr id="2" name="TextBox 1"/>
+          <p:cNvSpPr txBox="1"/>
+          <p:nvPr/>
+        </p:nvSpPr>
+        <p:spPr>
+          <a:xfrm>
+            <a:off x="548640" y="274320"/>
+            <a:ext cx="11064240" cy="822960"/>
+          </a:xfrm>
+          <a:prstGeom prst="rect">
+            <a:avLst/>
+          </a:prstGeom>
+          <a:noFill/>
+        </p:spPr>
+        <p:txBody>
+          <a:bodyPr wrap="square">
+            <a:spAutoFit/>
+          </a:bodyPr>
+          <a:lstStyle/>
+          <a:p>
+            <a:r>
+              <a:rPr sz="3000" b="1" i="0">
+                <a:solidFill>
+                  <a:srgbClr val="2B6CB0"/>
+                </a:solidFill>
+                <a:latin typeface="Calibri"/>
+              </a:rPr>
+              <a:t>How the exam asks this</a:t>
+            </a:r>
+          </a:p>
+        </p:txBody>
+      </p:sp>
+      <p:sp>
+        <p:nvSpPr>
+          <p:cNvPr id="3" name="TextBox 2"/>
+          <p:cNvSpPr txBox="1"/>
+          <p:nvPr/>
+        </p:nvSpPr>
+        <p:spPr>
+          <a:xfrm>
+            <a:off x="640080" y="1280160"/>
+            <a:ext cx="10881360" cy="5120640"/>
+          </a:xfrm>
+          <a:prstGeom prst="rect">
+            <a:avLst/>
+          </a:prstGeom>
+          <a:noFill/>
+        </p:spPr>
+        <p:txBody>
+          <a:bodyPr wrap="square">
+            <a:spAutoFit/>
+          </a:bodyPr>
+          <a:lstStyle/>
+          <a:p>
+            <a:pPr/>
+            <a:r>
+              <a:rPr sz="2000" b="0">
+                <a:solidFill>
+                  <a:srgbClr val="222222"/>
+                </a:solidFill>
+                <a:latin typeface="Calibri"/>
+              </a:rPr>
+              <a:t>Command words: describe and explain for individual issues (2-4 marks); discuss and evaluate for 9 or 12 mark levels-of-response essays, marked on AO1 knowledge, AO2 application and AO3 evaluation.</a:t>
+            </a:r>
+          </a:p>
+          <a:p>
+            <a:pPr/>
+            <a:r>
+              <a:rPr sz="2000" b="0">
+                <a:solidFill>
+                  <a:srgbClr val="222222"/>
+                </a:solidFill>
+                <a:latin typeface="Calibri"/>
+              </a:rPr>
+              <a:t>Level 3 descriptors demand both sides, named stakeholders, accurate terminology and a justified conclusion; a one-sided answer is capped regardless of length.</a:t>
+            </a:r>
+          </a:p>
+          <a:p>
+            <a:pPr/>
+            <a:r>
+              <a:rPr sz="2000" b="0">
+                <a:solidFill>
+                  <a:srgbClr val="222222"/>
+                </a:solidFill>
+                <a:latin typeface="Calibri"/>
+              </a:rPr>
+              <a:t>The scenario matters: generic pre-learned essays that ignore the stem lose the application marks.</a:t>
+            </a:r>
+          </a:p>
+          <a:p>
+            <a:pPr/>
+            <a:r>
+              <a:rPr sz="2000" b="0">
+                <a:solidFill>
+                  <a:srgbClr val="222222"/>
+                </a:solidFill>
+                <a:latin typeface="Calibri"/>
+              </a:rPr>
+              <a:t>Example stem: 'A city council plans to install facial recognition cameras throughout the town centre. Discuss the ethical issues this raises.' [9]</a:t>
+            </a:r>
+          </a:p>
+        </p:txBody>
+      </p:sp>
+    </p:spTree>
+  </p:cSld>
+  <p:clrMapOvr>
+    <a:masterClrMapping/>
+  </p:clrMapOvr>
+</p:sld>
+</file>
+
+<file path=ppt/slides/slide27.xml><?xml version="1.0" encoding="utf-8"?>
+<p:sld xmlns:a="http://schemas.openxmlformats.org/drawingml/2006/main" xmlns:p="http://schemas.openxmlformats.org/presentationml/2006/main" xmlns:r="http://schemas.openxmlformats.org/officeDocument/2006/relationships">
+  <p:cSld>
+    <p:bg>
+      <p:bgPr>
+        <a:solidFill>
+          <a:srgbClr val="FFFFFF"/>
+        </a:solidFill>
+        <a:effectLst/>
+      </p:bgPr>
+    </p:bg>
+    <p:spTree>
+      <p:nvGrpSpPr>
+        <p:cNvPr id="1" name=""/>
+        <p:cNvGrpSpPr/>
+        <p:nvPr/>
+      </p:nvGrpSpPr>
+      <p:grpSpPr/>
+      <p:sp>
+        <p:nvSpPr>
+          <p:cNvPr id="2" name="TextBox 1"/>
+          <p:cNvSpPr txBox="1"/>
+          <p:nvPr/>
+        </p:nvSpPr>
+        <p:spPr>
+          <a:xfrm>
+            <a:off x="548640" y="274320"/>
+            <a:ext cx="11064240" cy="822960"/>
+          </a:xfrm>
+          <a:prstGeom prst="rect">
+            <a:avLst/>
+          </a:prstGeom>
+          <a:noFill/>
+        </p:spPr>
+        <p:txBody>
+          <a:bodyPr wrap="square">
+            <a:spAutoFit/>
+          </a:bodyPr>
+          <a:lstStyle/>
+          <a:p>
+            <a:r>
+              <a:rPr sz="3000" b="1" i="0">
+                <a:solidFill>
+                  <a:srgbClr val="2B6CB0"/>
+                </a:solidFill>
+                <a:latin typeface="Calibri"/>
+              </a:rPr>
+              <a:t>Your turn</a:t>
+            </a:r>
+          </a:p>
+        </p:txBody>
+      </p:sp>
+      <p:sp>
+        <p:nvSpPr>
+          <p:cNvPr id="3" name="TextBox 2"/>
+          <p:cNvSpPr txBox="1"/>
+          <p:nvPr/>
+        </p:nvSpPr>
+        <p:spPr>
+          <a:xfrm>
+            <a:off x="640080" y="1280160"/>
+            <a:ext cx="10881360" cy="5120640"/>
+          </a:xfrm>
+          <a:prstGeom prst="rect">
+            <a:avLst/>
+          </a:prstGeom>
+          <a:noFill/>
+        </p:spPr>
+        <p:txBody>
+          <a:bodyPr wrap="square">
+            <a:spAutoFit/>
+          </a:bodyPr>
+          <a:lstStyle/>
+          <a:p>
+            <a:pPr/>
+            <a:r>
+              <a:rPr sz="2400" b="1">
+                <a:solidFill>
+                  <a:srgbClr val="2B6CB0"/>
+                </a:solidFill>
+                <a:latin typeface="Calibri"/>
+              </a:rPr>
+              <a:t>Task</a:t>
+            </a:r>
+          </a:p>
+          <a:p>
+            <a:pPr lvl="1"/>
+            <a:r>
+              <a:rPr sz="2200" b="0">
+                <a:solidFill>
+                  <a:srgbClr val="222222"/>
+                </a:solidFill>
+                <a:latin typeface="Calibri"/>
+              </a:rPr>
+              <a:t>Write a full Level 3 answer to: 'A hospital trust plans to use an AI system to prioritise patients on its waiting list. Discuss the ethical issues this raises.' [9] Requirements: at least four named stakeholders, at least two developed points on each side using the point-consequence-stakeholder-counter chain, one accurate link to legislation from 1.5.1, and a conclusion that takes a side with a condition.</a:t>
+            </a:r>
+          </a:p>
+          <a:p>
+            <a:r>
+              <a:rPr sz="2400" b="1">
+                <a:solidFill>
+                  <a:srgbClr val="B76E00"/>
+                </a:solidFill>
+                <a:latin typeface="Calibri"/>
+              </a:rPr>
+              <a:t>Challenge / stretch</a:t>
+            </a:r>
+          </a:p>
+          <a:p>
+            <a:pPr lvl="1"/>
+            <a:r>
+              <a:rPr sz="2200" b="0">
+                <a:solidFill>
+                  <a:srgbClr val="222222"/>
+                </a:solidFill>
+                <a:latin typeface="Calibri"/>
+              </a:rPr>
+              <a:t>Take the same hospital scenario and write the two-paragraph case for the opposite conclusion to the one you reached, equally well argued. Then write three sentences on what this exercise shows about how levels-of-response mark schemes reward reasoning rather than opinion.</a:t>
+            </a:r>
+          </a:p>
+        </p:txBody>
+      </p:sp>
+    </p:spTree>
+  </p:cSld>
+  <p:clrMapOvr>
+    <a:masterClrMapping/>
+  </p:clrMapOvr>
+</p:sld>
+</file>
+
+<file path=ppt/slides/slide28.xml><?xml version="1.0" encoding="utf-8"?>
+<p:sld xmlns:a="http://schemas.openxmlformats.org/drawingml/2006/main" xmlns:p="http://schemas.openxmlformats.org/presentationml/2006/main" xmlns:r="http://schemas.openxmlformats.org/officeDocument/2006/relationships">
+  <p:cSld>
+    <p:bg>
+      <p:bgPr>
+        <a:solidFill>
+          <a:srgbClr val="FFFFFF"/>
+        </a:solidFill>
+        <a:effectLst/>
+      </p:bgPr>
+    </p:bg>
+    <p:spTree>
+      <p:nvGrpSpPr>
+        <p:cNvPr id="1" name=""/>
+        <p:cNvGrpSpPr/>
+        <p:nvPr/>
+      </p:nvGrpSpPr>
+      <p:grpSpPr/>
+      <p:sp>
+        <p:nvSpPr>
+          <p:cNvPr id="2" name="TextBox 1"/>
+          <p:cNvSpPr txBox="1"/>
+          <p:nvPr/>
+        </p:nvSpPr>
+        <p:spPr>
+          <a:xfrm>
+            <a:off x="548640" y="274320"/>
+            <a:ext cx="11064240" cy="822960"/>
+          </a:xfrm>
+          <a:prstGeom prst="rect">
+            <a:avLst/>
+          </a:prstGeom>
+          <a:noFill/>
+        </p:spPr>
+        <p:txBody>
+          <a:bodyPr wrap="square">
+            <a:spAutoFit/>
+          </a:bodyPr>
+          <a:lstStyle/>
+          <a:p>
+            <a:r>
+              <a:rPr sz="3000" b="1" i="0">
+                <a:solidFill>
+                  <a:srgbClr val="2B6CB0"/>
+                </a:solidFill>
+                <a:latin typeface="Calibri"/>
+              </a:rPr>
+              <a:t>Exit ticket</a:t>
+            </a:r>
+          </a:p>
+        </p:txBody>
+      </p:sp>
+      <p:sp>
+        <p:nvSpPr>
+          <p:cNvPr id="3" name="TextBox 2"/>
+          <p:cNvSpPr txBox="1"/>
+          <p:nvPr/>
+        </p:nvSpPr>
+        <p:spPr>
+          <a:xfrm>
+            <a:off x="640080" y="1280160"/>
+            <a:ext cx="10881360" cy="5120640"/>
+          </a:xfrm>
+          <a:prstGeom prst="rect">
+            <a:avLst/>
+          </a:prstGeom>
+          <a:noFill/>
+        </p:spPr>
+        <p:txBody>
+          <a:bodyPr wrap="square">
+            <a:spAutoFit/>
+          </a:bodyPr>
+          <a:lstStyle/>
+          <a:p>
+            <a:r>
+              <a:rPr sz="2200" b="1">
+                <a:solidFill>
+                  <a:srgbClr val="222222"/>
+                </a:solidFill>
+                <a:latin typeface="Calibri"/>
+              </a:rPr>
+              <a:t>1. What three things must an answer show to reach Level 3 on a discuss question?</a:t>
+            </a:r>
+          </a:p>
+          <a:p>
+            <a:r>
+              <a:rPr sz="2200" b="1">
+                <a:solidFill>
+                  <a:srgbClr val="222222"/>
+                </a:solidFill>
+                <a:latin typeface="Calibri"/>
+              </a:rPr>
+              <a:t>2. Give one benefit and one harm of companies analysing customers' personal data.</a:t>
+            </a:r>
+          </a:p>
+          <a:p>
+            <a:r>
+              <a:rPr sz="2200" b="1">
+                <a:solidFill>
+                  <a:srgbClr val="222222"/>
+                </a:solidFill>
+                <a:latin typeface="Calibri"/>
+              </a:rPr>
+              <a:t>3. Why can automated decision making be unfair even when no human in the company is biased?</a:t>
+            </a:r>
+          </a:p>
+        </p:txBody>
+      </p:sp>
+    </p:spTree>
+  </p:cSld>
+  <p:clrMapOvr>
+    <a:masterClrMapping/>
+  </p:clrMapOvr>
+</p:sld>
+</file>
+
+<file path=ppt/slides/slide29.xml><?xml version="1.0" encoding="utf-8"?>
+<p:sld xmlns:a="http://schemas.openxmlformats.org/drawingml/2006/main" xmlns:p="http://schemas.openxmlformats.org/presentationml/2006/main" xmlns:r="http://schemas.openxmlformats.org/officeDocument/2006/relationships">
+  <p:cSld>
+    <p:bg>
+      <p:bgPr>
+        <a:solidFill>
+          <a:srgbClr val="FFFFFF"/>
+        </a:solidFill>
+        <a:effectLst/>
+      </p:bgPr>
+    </p:bg>
+    <p:spTree>
+      <p:nvGrpSpPr>
+        <p:cNvPr id="1" name=""/>
+        <p:cNvGrpSpPr/>
+        <p:nvPr/>
+      </p:nvGrpSpPr>
+      <p:grpSpPr/>
+      <p:sp>
+        <p:nvSpPr>
+          <p:cNvPr id="2" name="TextBox 1"/>
+          <p:cNvSpPr txBox="1"/>
+          <p:nvPr/>
+        </p:nvSpPr>
+        <p:spPr>
+          <a:xfrm>
+            <a:off x="548640" y="274320"/>
+            <a:ext cx="11064240" cy="822960"/>
+          </a:xfrm>
+          <a:prstGeom prst="rect">
+            <a:avLst/>
+          </a:prstGeom>
+          <a:noFill/>
+        </p:spPr>
+        <p:txBody>
+          <a:bodyPr wrap="square">
+            <a:spAutoFit/>
+          </a:bodyPr>
+          <a:lstStyle/>
+          <a:p>
+            <a:r>
+              <a:rPr sz="3000" b="1" i="0">
+                <a:solidFill>
+                  <a:srgbClr val="2B6CB0"/>
+                </a:solidFill>
+                <a:latin typeface="Calibri"/>
+              </a:rPr>
+              <a:t>Exit ticket — answers</a:t>
+            </a:r>
+          </a:p>
+        </p:txBody>
+      </p:sp>
+      <p:sp>
+        <p:nvSpPr>
+          <p:cNvPr id="3" name="TextBox 2"/>
+          <p:cNvSpPr txBox="1"/>
+          <p:nvPr/>
+        </p:nvSpPr>
+        <p:spPr>
+          <a:xfrm>
+            <a:off x="640080" y="1280160"/>
+            <a:ext cx="10881360" cy="5120640"/>
+          </a:xfrm>
+          <a:prstGeom prst="rect">
+            <a:avLst/>
+          </a:prstGeom>
+          <a:noFill/>
+        </p:spPr>
+        <p:txBody>
+          <a:bodyPr wrap="square">
+            <a:spAutoFit/>
+          </a:bodyPr>
+          <a:lstStyle/>
+          <a:p>
+            <a:r>
+              <a:rPr sz="2200" b="1">
+                <a:solidFill>
+                  <a:srgbClr val="222222"/>
+                </a:solidFill>
+                <a:latin typeface="Calibri"/>
+              </a:rPr>
+              <a:t>1. What three things must an answer show to reach Level 3 on a discuss question?</a:t>
+            </a:r>
+          </a:p>
+          <a:p>
+            <a:pPr lvl="1"/>
+            <a:r>
+              <a:rPr sz="1800" i="1">
+                <a:solidFill>
+                  <a:srgbClr val="B76E00"/>
+                </a:solidFill>
+                <a:latin typeface="Calibri"/>
+              </a:rPr>
+              <a:t>Answer: Both sides developed (benefits and drawbacks), named stakeholders with applied reasoning, and a justified conclusion that takes a supported position.</a:t>
+            </a:r>
+          </a:p>
+          <a:p>
+            <a:r>
+              <a:rPr sz="2200" b="1">
+                <a:solidFill>
+                  <a:srgbClr val="222222"/>
+                </a:solidFill>
+                <a:latin typeface="Calibri"/>
+              </a:rPr>
+              <a:t>2. Give one benefit and one harm of companies analysing customers' personal data.</a:t>
+            </a:r>
+          </a:p>
+          <a:p>
+            <a:pPr lvl="1"/>
+            <a:r>
+              <a:rPr sz="1800" i="1">
+                <a:solidFill>
+                  <a:srgbClr val="B76E00"/>
+                </a:solidFill>
+                <a:latin typeface="Calibri"/>
+              </a:rPr>
+              <a:t>Answer: Benefit: personalised services or fraud detection; harm: profiling, price discrimination or loss of privacy as data is sold onward.</a:t>
+            </a:r>
+          </a:p>
+          <a:p>
+            <a:r>
+              <a:rPr sz="2200" b="1">
+                <a:solidFill>
+                  <a:srgbClr val="222222"/>
+                </a:solidFill>
+                <a:latin typeface="Calibri"/>
+              </a:rPr>
+              <a:t>3. Why can automated decision making be unfair even when no human in the company is biased?</a:t>
+            </a:r>
+          </a:p>
+          <a:p>
+            <a:pPr lvl="1"/>
+            <a:r>
+              <a:rPr sz="1800" i="1">
+                <a:solidFill>
+                  <a:srgbClr val="B76E00"/>
+                </a:solidFill>
+                <a:latin typeface="Calibri"/>
+              </a:rPr>
+              <a:t>Answer: The system learns from historical data containing past bias and applies those patterns consistently at scale, with little transparency or route to appeal.</a:t>
             </a:r>
           </a:p>
         </p:txBody>
@@ -3984,7 +6464,7 @@
                 </a:solidFill>
                 <a:latin typeface="Calibri"/>
               </a:rPr>
-              <a:t>1. Which issue is raised when a factory replaces assembly-line workers with robots?</a:t>
+              <a:t>1. From 1.5.1: a company sells its customer list with no lawful basis. Which Act applies and what role does the company hold?</a:t>
             </a:r>
           </a:p>
           <a:p>
@@ -3995,7 +6475,7 @@
                 </a:solidFill>
                 <a:latin typeface="Calibri"/>
               </a:rPr>
-              <a:t>2. Why can an AI loan-approval system produce biased outcomes?</a:t>
+              <a:t>2. From 1.5.1: name the three original Computer Misuse Act offences in order of seriousness.</a:t>
             </a:r>
           </a:p>
           <a:p>
@@ -4006,7 +6486,7 @@
                 </a:solidFill>
                 <a:latin typeface="Calibri"/>
               </a:rPr>
-              <a:t>3. What is the digital divide?</a:t>
+              <a:t>3. From 1.5.1: which Act allows properly authorised police to intercept a suspect's messages, and why is authorisation required?</a:t>
             </a:r>
           </a:p>
           <a:p>
@@ -4017,7 +6497,7 @@
                 </a:solidFill>
                 <a:latin typeface="Calibri"/>
               </a:rPr>
-              <a:t>4. Interleaving 1.5.1: which Act would apply if a government body intercepted communications without proper authorisation?</a:t>
+              <a:t>4. From 1.5.1: a student downloads a cracked copy of paid software. Which Act is broken and what does it protect?</a:t>
             </a:r>
           </a:p>
           <a:p>
@@ -4028,7 +6508,7 @@
                 </a:solidFill>
                 <a:latin typeface="Calibri"/>
               </a:rPr>
-              <a:t>5. Interleaving 1.5.1: a firm stores customers' personal data insecurely — which law have they breached?</a:t>
+              <a:t>5. From 2.3.1: a face-matching system compares one face against n stored faces with a linear search. State the time complexity and one better approach.</a:t>
             </a:r>
           </a:p>
         </p:txBody>
@@ -4122,7 +6602,7 @@
                 </a:solidFill>
                 <a:latin typeface="Calibri"/>
               </a:rPr>
-              <a:t>1. Which issue is raised when a factory replaces assembly-line workers with robots?</a:t>
+              <a:t>1. From 1.5.1: a company sells its customer list with no lawful basis. Which Act applies and what role does the company hold?</a:t>
             </a:r>
           </a:p>
           <a:p>
@@ -4134,7 +6614,7 @@
                 </a:solidFill>
                 <a:latin typeface="Calibri"/>
               </a:rPr>
-              <a:t>Answer: Automation and its impact on the workforce.</a:t>
+              <a:t>Answer: The Data Protection Act 2018; the company is the data controller, breaching the lawfulness, fairness and transparency principle.</a:t>
             </a:r>
           </a:p>
           <a:p>
@@ -4145,7 +6625,7 @@
                 </a:solidFill>
                 <a:latin typeface="Calibri"/>
               </a:rPr>
-              <a:t>2. Why can an AI loan-approval system produce biased outcomes?</a:t>
+              <a:t>2. From 1.5.1: name the three original Computer Misuse Act offences in order of seriousness.</a:t>
             </a:r>
           </a:p>
           <a:p>
@@ -4157,7 +6637,7 @@
                 </a:solidFill>
                 <a:latin typeface="Calibri"/>
               </a:rPr>
-              <a:t>Answer: It learns patterns from training data; if that data reflects historical or societal bias, the model reproduces or amplifies it, and a 'black box' makes this hard to detect.</a:t>
+              <a:t>Answer: Unauthorised access; unauthorised access with intent to commit a further offence; unauthorised modification of computer material.</a:t>
             </a:r>
           </a:p>
           <a:p>
@@ -4168,7 +6648,7 @@
                 </a:solidFill>
                 <a:latin typeface="Calibri"/>
               </a:rPr>
-              <a:t>3. What is the digital divide?</a:t>
+              <a:t>3. From 1.5.1: which Act allows properly authorised police to intercept a suspect's messages, and why is authorisation required?</a:t>
             </a:r>
           </a:p>
           <a:p>
@@ -4180,7 +6660,7 @@
                 </a:solidFill>
                 <a:latin typeface="Calibri"/>
               </a:rPr>
-              <a:t>Answer: The gap between people who have access to technology and the skills to use it, and those who do not.</a:t>
+              <a:t>Answer: RIPA 2000; authorisation controls who can use intrusive powers, preventing abuse.</a:t>
             </a:r>
           </a:p>
           <a:p>
@@ -4191,7 +6671,7 @@
                 </a:solidFill>
                 <a:latin typeface="Calibri"/>
               </a:rPr>
-              <a:t>4. Interleaving 1.5.1: which Act would apply if a government body intercepted communications without proper authorisation?</a:t>
+              <a:t>4. From 1.5.1: a student downloads a cracked copy of paid software. Which Act is broken and what does it protect?</a:t>
             </a:r>
           </a:p>
           <a:p>
@@ -4203,7 +6683,7 @@
                 </a:solidFill>
                 <a:latin typeface="Calibri"/>
               </a:rPr>
-              <a:t>Answer: The Regulation of Investigatory Powers Act 2000 (RIPA).</a:t>
+              <a:t>Answer: Copyright, Designs and Patents Act 1988; it automatically protects the expression of original works, so copying needs a licence.</a:t>
             </a:r>
           </a:p>
           <a:p>
@@ -4214,7 +6694,7 @@
                 </a:solidFill>
                 <a:latin typeface="Calibri"/>
               </a:rPr>
-              <a:t>5. Interleaving 1.5.1: a firm stores customers' personal data insecurely — which law have they breached?</a:t>
+              <a:t>5. From 2.3.1: a face-matching system compares one face against n stored faces with a linear search. State the time complexity and one better approach.</a:t>
             </a:r>
           </a:p>
           <a:p>
@@ -4226,7 +6706,7 @@
                 </a:solidFill>
                 <a:latin typeface="Calibri"/>
               </a:rPr>
-              <a:t>Answer: The Data Protection Act 2018 / GDPR (the security / integrity &amp; confidentiality principle).</a:t>
+              <a:t>Answer: O(n); use a sorted or hashed/indexed structure so the lookup does not grow linearly with the database.</a:t>
             </a:r>
           </a:p>
         </p:txBody>
@@ -4321,6 +6801,26 @@
                 </a:solidFill>
                 <a:latin typeface="Calibri"/>
               </a:rPr>
+              <a:t>Stakeholder</a:t>
+            </a:r>
+            <a:r>
+              <a:rPr sz="1800">
+                <a:solidFill>
+                  <a:srgbClr val="222222"/>
+                </a:solidFill>
+                <a:latin typeface="Calibri"/>
+              </a:rPr>
+              <a:t> — Any party affected by a decision: individuals, employees, businesses, government, society or the environment.</a:t>
+            </a:r>
+          </a:p>
+          <a:p>
+            <a:r>
+              <a:rPr b="1" sz="2000">
+                <a:solidFill>
+                  <a:srgbClr val="1A365D"/>
+                </a:solidFill>
+                <a:latin typeface="Calibri"/>
+              </a:rPr>
               <a:t>Automation</a:t>
             </a:r>
             <a:r>
@@ -4330,7 +6830,7 @@
                 </a:solidFill>
                 <a:latin typeface="Calibri"/>
               </a:rPr>
-              <a:t> — Using machines or software to carry out tasks previously done by humans.</a:t>
+              <a:t> — Machines or software performing tasks previously done by humans.</a:t>
             </a:r>
           </a:p>
           <a:p>
@@ -4350,7 +6850,7 @@
                 </a:solidFill>
                 <a:latin typeface="Calibri"/>
               </a:rPr>
-              <a:t> — Unfair outcomes produced when an AI reproduces or amplifies bias present in its training data.</a:t>
+              <a:t> — Unfair outcomes an automated system reproduces or amplifies from patterns in its training data.</a:t>
             </a:r>
           </a:p>
           <a:p>
@@ -4361,7 +6861,7 @@
                 </a:solidFill>
                 <a:latin typeface="Calibri"/>
               </a:rPr>
-              <a:t>Stakeholder</a:t>
+              <a:t>Digital divide</a:t>
             </a:r>
             <a:r>
               <a:rPr sz="1800">
@@ -4370,7 +6870,7 @@
                 </a:solidFill>
                 <a:latin typeface="Calibri"/>
               </a:rPr>
-              <a:t> — Any group or individual affected by a decision — e.g. employees, customers, businesses, society or the environment.</a:t>
+              <a:t> — The gap between those with and without access to technology and the skills to use it.</a:t>
             </a:r>
           </a:p>
           <a:p>
@@ -4381,7 +6881,7 @@
                 </a:solidFill>
                 <a:latin typeface="Calibri"/>
               </a:rPr>
-              <a:t>Digital divide</a:t>
+              <a:t>Censorship</a:t>
             </a:r>
             <a:r>
               <a:rPr sz="1800">
@@ -4390,7 +6890,7 @@
                 </a:solidFill>
                 <a:latin typeface="Calibri"/>
               </a:rPr>
-              <a:t> — The inequality between those with access to technology and digital skills and those without.</a:t>
+              <a:t> — Controlling which content may be published or accessed, by states, platforms or filters.</a:t>
             </a:r>
           </a:p>
           <a:p>
@@ -4401,6 +6901,26 @@
                 </a:solidFill>
                 <a:latin typeface="Calibri"/>
               </a:rPr>
+              <a:t>Surveillance</a:t>
+            </a:r>
+            <a:r>
+              <a:rPr sz="1800">
+                <a:solidFill>
+                  <a:srgbClr val="222222"/>
+                </a:solidFill>
+                <a:latin typeface="Calibri"/>
+              </a:rPr>
+              <a:t> — Monitoring people's activity or communications, by employers, companies or the state.</a:t>
+            </a:r>
+          </a:p>
+          <a:p>
+            <a:r>
+              <a:rPr b="1" sz="2000">
+                <a:solidFill>
+                  <a:srgbClr val="1A365D"/>
+                </a:solidFill>
+                <a:latin typeface="Calibri"/>
+              </a:rPr>
               <a:t>Offshoring</a:t>
             </a:r>
             <a:r>
@@ -4410,7 +6930,7 @@
                 </a:solidFill>
                 <a:latin typeface="Calibri"/>
               </a:rPr>
-              <a:t> — Moving work or services abroad, usually to reduce labour costs.</a:t>
+              <a:t> — Moving work to another country, usually to reduce labour costs.</a:t>
             </a:r>
           </a:p>
           <a:p>
@@ -4421,7 +6941,7 @@
                 </a:solidFill>
                 <a:latin typeface="Calibri"/>
               </a:rPr>
-              <a:t>Vendor lock-in</a:t>
+              <a:t>E-waste</a:t>
             </a:r>
             <a:r>
               <a:rPr sz="1800">
@@ -4430,7 +6950,7 @@
                 </a:solidFill>
                 <a:latin typeface="Calibri"/>
               </a:rPr>
-              <a:t> — Dependence on one supplier's product, making it costly or difficult to switch — often linked to monopolies.</a:t>
+              <a:t> — Discarded electronic devices, often containing toxic materials and hard-to-recover rare metals.</a:t>
             </a:r>
           </a:p>
           <a:p>
@@ -4441,7 +6961,7 @@
                 </a:solidFill>
                 <a:latin typeface="Calibri"/>
               </a:rPr>
-              <a:t>Surveillance</a:t>
+              <a:t>Unicode</a:t>
             </a:r>
             <a:r>
               <a:rPr sz="1800">
@@ -4450,27 +6970,7 @@
                 </a:solidFill>
                 <a:latin typeface="Calibri"/>
               </a:rPr>
-              <a:t> — Large-scale monitoring or data collection by firms or governments, raising privacy concerns.</a:t>
-            </a:r>
-          </a:p>
-          <a:p>
-            <a:r>
-              <a:rPr b="1" sz="2000">
-                <a:solidFill>
-                  <a:srgbClr val="1A365D"/>
-                </a:solidFill>
-                <a:latin typeface="Calibri"/>
-              </a:rPr>
-              <a:t>E-waste</a:t>
-            </a:r>
-            <a:r>
-              <a:rPr sz="1800">
-                <a:solidFill>
-                  <a:srgbClr val="222222"/>
-                </a:solidFill>
-                <a:latin typeface="Calibri"/>
-              </a:rPr>
-              <a:t> — Discarded electronic equipment, an environmental drawback of computing due to toxins and disposal volume.</a:t>
+              <a:t> — A character set giving a unique code point to characters of the world's writing systems, unlike Latin-only ASCII.</a:t>
             </a:r>
           </a:p>
         </p:txBody>
@@ -4530,7 +7030,7 @@
                 </a:solidFill>
                 <a:latin typeface="Calibri"/>
               </a:rPr>
-              <a:t>Automation, decision making and jobs</a:t>
+              <a:t>How to argue about any issue</a:t>
             </a:r>
           </a:p>
         </p:txBody>
@@ -4565,7 +7065,7 @@
                 </a:solidFill>
                 <a:latin typeface="Calibri"/>
               </a:rPr>
-              <a:t>Automation lets machines do human tasks: boosting productivity and cutting cost, but displacing low-skilled workers and causing deskilling.</a:t>
+              <a:t>Every issue is a trade-off: the same fact benefits one stakeholder and harms another.</a:t>
             </a:r>
           </a:p>
           <a:p>
@@ -4577,7 +7077,7 @@
                 </a:solidFill>
                 <a:latin typeface="Calibri"/>
               </a:rPr>
-              <a:t>Automated decision making (loans, CV sifting, self-driving cars) is fast, consistent and tireless, but lacks empathy, is hard to appeal and raises liability questions (the trolley problem).</a:t>
+              <a:t>Name specific stakeholders: individuals, employees, businesses, government and society, the environment, future generations.</a:t>
             </a:r>
           </a:p>
           <a:p>
@@ -4589,7 +7089,7 @@
                 </a:solidFill>
                 <a:latin typeface="Calibri"/>
               </a:rPr>
-              <a:t>Offshoring and layoffs cut costs and use global talent, but cause local job losses and raise quality, time-zone and data-security concerns.</a:t>
+              <a:t>Develop points as chains: point, consequence, stakeholder affected, counter-point.</a:t>
             </a:r>
           </a:p>
           <a:p>
@@ -4601,7 +7101,31 @@
                 </a:solidFill>
                 <a:latin typeface="Calibri"/>
               </a:rPr>
-              <a:t>Stakeholders pull in different directions: businesses gain efficiency while employees and local communities bear the cost.</a:t>
+              <a:t>There is no 'right opinion'; credit comes from balanced, developed reasoning and a justified conclusion.</a:t>
+            </a:r>
+          </a:p>
+          <a:p>
+            <a:pPr/>
+            <a:r>
+              <a:rPr sz="2000" b="0">
+                <a:solidFill>
+                  <a:srgbClr val="222222"/>
+                </a:solidFill>
+                <a:latin typeface="Calibri"/>
+              </a:rPr>
+              <a:t>Link to 1.5.1 law where relevant: monitoring engages RIPA, profiling engages the DPA.</a:t>
+            </a:r>
+          </a:p>
+          <a:p>
+            <a:pPr/>
+            <a:r>
+              <a:rPr sz="1800" b="1">
+                <a:solidFill>
+                  <a:srgbClr val="B76E00"/>
+                </a:solidFill>
+                <a:latin typeface="Calibri"/>
+              </a:rPr>
+              <a:t>One-sided answers cannot reach the top level, however detailed they are.</a:t>
             </a:r>
           </a:p>
         </p:txBody>
@@ -4661,7 +7185,7 @@
                 </a:solidFill>
                 <a:latin typeface="Calibri"/>
               </a:rPr>
-              <a:t>AI ethics and bias</a:t>
+              <a:t>Computers in the workforce</a:t>
             </a:r>
           </a:p>
         </p:txBody>
@@ -4696,7 +7220,7 @@
                 </a:solidFill>
                 <a:latin typeface="Calibri"/>
               </a:rPr>
-              <a:t>AI learns from data and can act autonomously, giving powerful pattern-finding, efficiency and aids such as medical diagnosis.</a:t>
+              <a:t>Benefits: higher productivity, lower prices, machines take dangerous or repetitive jobs, new technical roles created.</a:t>
             </a:r>
           </a:p>
           <a:p>
@@ -4708,7 +7232,7 @@
                 </a:solidFill>
                 <a:latin typeface="Calibri"/>
               </a:rPr>
-              <a:t>It can reproduce or amplify bias in its training data, producing unfair outcomes for certain groups.</a:t>
+              <a:t>Harms: displacement of low-skilled workers, deskilling of surviving roles, offshoring as work moves online.</a:t>
             </a:r>
           </a:p>
           <a:p>
@@ -4720,7 +7244,7 @@
                 </a:solidFill>
                 <a:latin typeface="Calibri"/>
               </a:rPr>
-              <a:t>Many models are a 'black box', making decisions hard to explain and accountability unclear.</a:t>
+              <a:t>Individuals lose income and identity; businesses gain competitiveness; society pays retraining and unemployment costs.</a:t>
             </a:r>
           </a:p>
           <a:p>
@@ -4732,7 +7256,19 @@
                 </a:solidFill>
                 <a:latin typeface="Calibri"/>
               </a:rPr>
-              <a:t>Mitigations include representative data, transparency and human oversight of important decisions.</a:t>
+              <a:t>New jobs often need different skills in different places from the jobs destroyed.</a:t>
+            </a:r>
+          </a:p>
+          <a:p>
+            <a:pPr/>
+            <a:r>
+              <a:rPr sz="2000" b="0">
+                <a:solidFill>
+                  <a:srgbClr val="222222"/>
+                </a:solidFill>
+                <a:latin typeface="Calibri"/>
+              </a:rPr>
+              <a:t>Balanced view: transition support and retraining decide whether change is fair.</a:t>
             </a:r>
           </a:p>
         </p:txBody>
@@ -4792,7 +7328,7 @@
                 </a:solidFill>
                 <a:latin typeface="Calibri"/>
               </a:rPr>
-              <a:t>Environmental impact</a:t>
+              <a:t>Automated decision making</a:t>
             </a:r>
           </a:p>
         </p:txBody>
@@ -4827,7 +7363,7 @@
                 </a:solidFill>
                 <a:latin typeface="Calibri"/>
               </a:rPr>
-              <a:t>Computing can reduce travel through remote working, support smart grids and enable paperless offices.</a:t>
+              <a:t>Software now decides loans, insurance prices, CV shortlists, even sentencing recommendations.</a:t>
             </a:r>
           </a:p>
           <a:p>
@@ -4839,7 +7375,7 @@
                 </a:solidFill>
                 <a:latin typeface="Calibri"/>
               </a:rPr>
-              <a:t>But it generates e-waste and toxins, and data centres and cryptocurrency mining consume huge amounts of energy.</a:t>
+              <a:t>Benefits: fast, consistent, tireless, applies the same rules to everyone, handles huge volumes.</a:t>
             </a:r>
           </a:p>
           <a:p>
@@ -4851,7 +7387,7 @@
                 </a:solidFill>
                 <a:latin typeface="Calibri"/>
               </a:rPr>
-              <a:t>Manufacturing relies on rare-earth mining with its own environmental and social costs.</a:t>
+              <a:t>Harms: no empathy for edge cases, opaque reasoning, difficult to appeal, liability unclear when it errs.</a:t>
             </a:r>
           </a:p>
           <a:p>
@@ -4863,7 +7399,19 @@
                 </a:solidFill>
                 <a:latin typeface="Calibri"/>
               </a:rPr>
-              <a:t>The same technology is therefore both part of the problem and part of the solution.</a:t>
+              <a:t>Self-driving cars sharpen the liability question: who answers for a crash decided by code?</a:t>
+            </a:r>
+          </a:p>
+          <a:p>
+            <a:pPr/>
+            <a:r>
+              <a:rPr sz="2000" b="0">
+                <a:solidFill>
+                  <a:srgbClr val="222222"/>
+                </a:solidFill>
+                <a:latin typeface="Calibri"/>
+              </a:rPr>
+              <a:t>The DPA gives subjects rights around purely automated decisions with significant effects (links to 1.5.1).</a:t>
             </a:r>
           </a:p>
         </p:txBody>
@@ -4923,7 +7471,7 @@
                 </a:solidFill>
                 <a:latin typeface="Calibri"/>
               </a:rPr>
-              <a:t>Censorship, monopolies and the digital divide</a:t>
+              <a:t>Artificial intelligence</a:t>
             </a:r>
           </a:p>
         </p:txBody>
@@ -4958,7 +7506,7 @@
                 </a:solidFill>
                 <a:latin typeface="Calibri"/>
               </a:rPr>
-              <a:t>Censorship can protect children and block illegal or extremist content, but restricts free speech and can be abused by states to silence dissent.</a:t>
+              <a:t>AI finds patterns at superhuman scale: medical diagnosis, translation, fraud detection.</a:t>
             </a:r>
           </a:p>
           <a:p>
@@ -4970,7 +7518,7 @@
                 </a:solidFill>
                 <a:latin typeface="Calibri"/>
               </a:rPr>
-              <a:t>Monopolies bring standards, polish and support, but stifle competition and create high prices and vendor lock-in (open-source counters this).</a:t>
+              <a:t>It learns from historical data, so it reproduces and can amplify historical bias.</a:t>
             </a:r>
           </a:p>
           <a:p>
@@ -4982,7 +7530,7 @@
                 </a:solidFill>
                 <a:latin typeface="Calibri"/>
               </a:rPr>
-              <a:t>The digital divide excludes the poor, rural, elderly and disabled, widening inequality.</a:t>
+              <a:t>Many models are black boxes: even their builders cannot fully explain individual outputs.</a:t>
             </a:r>
           </a:p>
           <a:p>
@@ -4994,7 +7542,31 @@
                 </a:solidFill>
                 <a:latin typeface="Calibri"/>
               </a:rPr>
-              <a:t>Privacy and surveillance offer personalised services and crime prevention, but risk profiling, breaches and a chilling effect (links to DPA and RIPA).</a:t>
+              <a:t>Accountability is unclear: developer, trainer, deployer or user when harm occurs?</a:t>
+            </a:r>
+          </a:p>
+          <a:p>
+            <a:pPr/>
+            <a:r>
+              <a:rPr sz="2000" b="0">
+                <a:solidFill>
+                  <a:srgbClr val="222222"/>
+                </a:solidFill>
+                <a:latin typeface="Calibri"/>
+              </a:rPr>
+              <a:t>Training and running large models consumes significant energy (links to environmental effects).</a:t>
+            </a:r>
+          </a:p>
+          <a:p>
+            <a:pPr/>
+            <a:r>
+              <a:rPr sz="1800" b="1">
+                <a:solidFill>
+                  <a:srgbClr val="B76E00"/>
+                </a:solidFill>
+                <a:latin typeface="Calibri"/>
+              </a:rPr>
+              <a:t>Exam-safe phrasing: AI is only as fair as the data it was trained on.</a:t>
             </a:r>
           </a:p>
         </p:txBody>
